--- a/UHabitacional_Presentacion.pptx
+++ b/UHabitacional_Presentacion.pptx
@@ -5,7 +5,7 @@
     <p:sldMasterId id="2147483648" r:id="rId1"/>
   </p:sldMasterIdLst>
   <p:notesMasterIdLst>
-    <p:notesMasterId r:id="rId14"/>
+    <p:notesMasterId r:id="rId13"/>
   </p:notesMasterIdLst>
   <p:sldIdLst>
     <p:sldId id="256" r:id="rId2"/>
@@ -17,9 +17,8 @@
     <p:sldId id="262" r:id="rId8"/>
     <p:sldId id="263" r:id="rId9"/>
     <p:sldId id="264" r:id="rId10"/>
-    <p:sldId id="265" r:id="rId11"/>
-    <p:sldId id="266" r:id="rId12"/>
-    <p:sldId id="267" r:id="rId13"/>
+    <p:sldId id="266" r:id="rId11"/>
+    <p:sldId id="267" r:id="rId12"/>
   </p:sldIdLst>
   <p:sldSz cx="12192000" cy="6858000"/>
   <p:notesSz cx="6858000" cy="12192000"/>
@@ -482,90 +481,6 @@
             <a:fld id="{F7021451-1387-4CA6-816F-3879F97B5CBC}" type="slidenum">
               <a:rPr lang="en-US"/>
               <a:t>11</a:t>
-            </a:fld>
-            <a:endParaRPr lang="en-US"/>
-          </a:p>
-        </p:txBody>
-      </p:sp>
-    </p:spTree>
-    <p:extLst>
-      <p:ext uri="{BB962C8B-B14F-4D97-AF65-F5344CB8AC3E}">
-        <p14:creationId xmlns:p14="http://schemas.microsoft.com/office/powerpoint/2010/main" val="1024086991"/>
-      </p:ext>
-    </p:extLst>
-  </p:cSld>
-  <p:clrMapOvr>
-    <a:masterClrMapping/>
-  </p:clrMapOvr>
-</p:notes>
-</file>
-
-<file path=ppt/notesSlides/notesSlide12.xml><?xml version="1.0" encoding="utf-8"?>
-<p:notes xmlns:a="http://schemas.openxmlformats.org/drawingml/2006/main" xmlns:r="http://schemas.openxmlformats.org/officeDocument/2006/relationships" xmlns:p="http://schemas.openxmlformats.org/presentationml/2006/main">
-  <p:cSld>
-    <p:spTree>
-      <p:nvGrpSpPr>
-        <p:cNvPr id="1" name=""/>
-        <p:cNvGrpSpPr/>
-        <p:nvPr/>
-      </p:nvGrpSpPr>
-      <p:grpSpPr>
-        <a:xfrm>
-          <a:off x="0" y="0"/>
-          <a:ext cx="0" cy="0"/>
-          <a:chOff x="0" y="0"/>
-          <a:chExt cx="0" cy="0"/>
-        </a:xfrm>
-      </p:grpSpPr>
-      <p:sp>
-        <p:nvSpPr>
-          <p:cNvPr id="2" name="Slide Image Placeholder 1"/>
-          <p:cNvSpPr>
-            <a:spLocks noGrp="1" noRot="1" noChangeAspect="1"/>
-          </p:cNvSpPr>
-          <p:nvPr>
-            <p:ph type="sldImg"/>
-          </p:nvPr>
-        </p:nvSpPr>
-        <p:spPr/>
-      </p:sp>
-      <p:sp>
-        <p:nvSpPr>
-          <p:cNvPr id="3" name="Notes Placeholder 2"/>
-          <p:cNvSpPr>
-            <a:spLocks noGrp="1"/>
-          </p:cNvSpPr>
-          <p:nvPr>
-            <p:ph type="body" idx="1"/>
-          </p:nvPr>
-        </p:nvSpPr>
-        <p:spPr/>
-        <p:txBody>
-          <a:bodyPr/>
-          <a:lstStyle/>
-          <a:p>
-            <a:endParaRPr lang="en-US" dirty="0"/>
-          </a:p>
-        </p:txBody>
-      </p:sp>
-      <p:sp>
-        <p:nvSpPr>
-          <p:cNvPr id="4" name="Slide Number Placeholder 3"/>
-          <p:cNvSpPr>
-            <a:spLocks noGrp="1"/>
-          </p:cNvSpPr>
-          <p:nvPr>
-            <p:ph type="sldNum" sz="quarter" idx="10"/>
-          </p:nvPr>
-        </p:nvSpPr>
-        <p:spPr/>
-        <p:txBody>
-          <a:bodyPr/>
-          <a:lstStyle/>
-          <a:p>
-            <a:fld id="{F7021451-1387-4CA6-816F-3879F97B5CBC}" type="slidenum">
-              <a:rPr lang="en-US"/>
-              <a:t>12</a:t>
             </a:fld>
             <a:endParaRPr lang="en-US"/>
           </a:p>
@@ -2546,1387 +2461,6 @@
 
 <file path=ppt/slides/slide10.xml><?xml version="1.0" encoding="utf-8"?>
 <p:sld xmlns:a="http://schemas.openxmlformats.org/drawingml/2006/main" xmlns:r="http://schemas.openxmlformats.org/officeDocument/2006/relationships" xmlns:p="http://schemas.openxmlformats.org/presentationml/2006/main">
-  <p:cSld name="Slide 10">
-    <p:bg>
-      <p:bgPr>
-        <a:solidFill>
-          <a:srgbClr val="FBFAF7"/>
-        </a:solidFill>
-        <a:effectLst/>
-      </p:bgPr>
-    </p:bg>
-    <p:spTree>
-      <p:nvGrpSpPr>
-        <p:cNvPr id="1" name=""/>
-        <p:cNvGrpSpPr/>
-        <p:nvPr/>
-      </p:nvGrpSpPr>
-      <p:grpSpPr>
-        <a:xfrm>
-          <a:off x="0" y="0"/>
-          <a:ext cx="0" cy="0"/>
-          <a:chOff x="0" y="0"/>
-          <a:chExt cx="0" cy="0"/>
-        </a:xfrm>
-      </p:grpSpPr>
-      <p:sp>
-        <p:nvSpPr>
-          <p:cNvPr id="2" name="Shape 0"/>
-          <p:cNvSpPr/>
-          <p:nvPr/>
-        </p:nvSpPr>
-        <p:spPr>
-          <a:xfrm>
-            <a:off x="457200" y="411480"/>
-            <a:ext cx="201168" cy="201168"/>
-          </a:xfrm>
-          <a:prstGeom prst="rect">
-            <a:avLst/>
-          </a:prstGeom>
-          <a:solidFill>
-            <a:srgbClr val="2D4A3E"/>
-          </a:solidFill>
-          <a:ln w="12700">
-            <a:solidFill>
-              <a:srgbClr val="2D4A3E"/>
-            </a:solidFill>
-            <a:prstDash val="solid"/>
-          </a:ln>
-        </p:spPr>
-      </p:sp>
-      <p:sp>
-        <p:nvSpPr>
-          <p:cNvPr id="3" name="Shape 1"/>
-          <p:cNvSpPr/>
-          <p:nvPr/>
-        </p:nvSpPr>
-        <p:spPr>
-          <a:xfrm>
-            <a:off x="676656" y="411480"/>
-            <a:ext cx="201168" cy="201168"/>
-          </a:xfrm>
-          <a:prstGeom prst="rect">
-            <a:avLst/>
-          </a:prstGeom>
-          <a:solidFill>
-            <a:srgbClr val="CB6843"/>
-          </a:solidFill>
-          <a:ln w="12700">
-            <a:solidFill>
-              <a:srgbClr val="CB6843"/>
-            </a:solidFill>
-            <a:prstDash val="solid"/>
-          </a:ln>
-        </p:spPr>
-      </p:sp>
-      <p:sp>
-        <p:nvSpPr>
-          <p:cNvPr id="4" name="Shape 2"/>
-          <p:cNvSpPr/>
-          <p:nvPr/>
-        </p:nvSpPr>
-        <p:spPr>
-          <a:xfrm>
-            <a:off x="457200" y="630936"/>
-            <a:ext cx="420624" cy="45720"/>
-          </a:xfrm>
-          <a:prstGeom prst="rect">
-            <a:avLst/>
-          </a:prstGeom>
-          <a:solidFill>
-            <a:srgbClr val="2D4A3E"/>
-          </a:solidFill>
-          <a:ln w="12700">
-            <a:solidFill>
-              <a:srgbClr val="2D4A3E"/>
-            </a:solidFill>
-            <a:prstDash val="solid"/>
-          </a:ln>
-        </p:spPr>
-      </p:sp>
-      <p:sp>
-        <p:nvSpPr>
-          <p:cNvPr id="5" name="Text 3"/>
-          <p:cNvSpPr/>
-          <p:nvPr/>
-        </p:nvSpPr>
-        <p:spPr>
-          <a:xfrm>
-            <a:off x="960120" y="384048"/>
-            <a:ext cx="3200400" cy="274320"/>
-          </a:xfrm>
-          <a:prstGeom prst="rect">
-            <a:avLst/>
-          </a:prstGeom>
-          <a:noFill/>
-          <a:ln/>
-        </p:spPr>
-        <p:txBody>
-          <a:bodyPr wrap="square" lIns="0" tIns="0" rIns="0" bIns="0" rtlCol="0" anchor="ctr"/>
-          <a:lstStyle/>
-          <a:p>
-            <a:pPr marL="0" indent="0">
-              <a:buNone/>
-            </a:pPr>
-            <a:r>
-              <a:rPr lang="en-US" sz="1100" b="1" dirty="0">
-                <a:solidFill>
-                  <a:srgbClr val="2D4A3E"/>
-                </a:solidFill>
-                <a:latin typeface="Plus Jakarta Sans" pitchFamily="34" charset="0"/>
-                <a:ea typeface="Plus Jakarta Sans" pitchFamily="34" charset="-122"/>
-                <a:cs typeface="Plus Jakarta Sans" pitchFamily="34" charset="-120"/>
-              </a:rPr>
-              <a:t>UHabitacional</a:t>
-            </a:r>
-            <a:endParaRPr lang="en-US" sz="1100" dirty="0"/>
-          </a:p>
-        </p:txBody>
-      </p:sp>
-      <p:sp>
-        <p:nvSpPr>
-          <p:cNvPr id="6" name="Text 4"/>
-          <p:cNvSpPr/>
-          <p:nvPr/>
-        </p:nvSpPr>
-        <p:spPr>
-          <a:xfrm>
-            <a:off x="960120" y="557784"/>
-            <a:ext cx="3657600" cy="201168"/>
-          </a:xfrm>
-          <a:prstGeom prst="rect">
-            <a:avLst/>
-          </a:prstGeom>
-          <a:noFill/>
-          <a:ln/>
-        </p:spPr>
-        <p:txBody>
-          <a:bodyPr wrap="square" lIns="0" tIns="0" rIns="0" bIns="0" rtlCol="0" anchor="ctr"/>
-          <a:lstStyle/>
-          <a:p>
-            <a:pPr marL="0" indent="0">
-              <a:buNone/>
-            </a:pPr>
-            <a:r>
-              <a:rPr lang="en-US" sz="800" dirty="0">
-                <a:solidFill>
-                  <a:srgbClr val="6E6E6E"/>
-                </a:solidFill>
-                <a:latin typeface="Inter" pitchFamily="34" charset="0"/>
-                <a:ea typeface="Inter" pitchFamily="34" charset="-122"/>
-                <a:cs typeface="Inter" pitchFamily="34" charset="-120"/>
-              </a:rPr>
-              <a:t>Diplomado .NET • Aplicaciones Empresariales</a:t>
-            </a:r>
-            <a:endParaRPr lang="en-US" sz="800" dirty="0"/>
-          </a:p>
-        </p:txBody>
-      </p:sp>
-      <p:sp>
-        <p:nvSpPr>
-          <p:cNvPr id="7" name="Text 5"/>
-          <p:cNvSpPr/>
-          <p:nvPr/>
-        </p:nvSpPr>
-        <p:spPr>
-          <a:xfrm>
-            <a:off x="457200" y="1051560"/>
-            <a:ext cx="11247120" cy="274320"/>
-          </a:xfrm>
-          <a:prstGeom prst="rect">
-            <a:avLst/>
-          </a:prstGeom>
-          <a:noFill/>
-          <a:ln/>
-        </p:spPr>
-        <p:txBody>
-          <a:bodyPr wrap="square" lIns="0" tIns="0" rIns="0" bIns="0" rtlCol="0" anchor="ctr"/>
-          <a:lstStyle/>
-          <a:p>
-            <a:pPr marL="0" indent="0">
-              <a:buNone/>
-            </a:pPr>
-            <a:r>
-              <a:rPr lang="en-US" sz="1100" b="1" kern="0" spc="400" dirty="0">
-                <a:solidFill>
-                  <a:srgbClr val="CB6843"/>
-                </a:solidFill>
-                <a:latin typeface="Inter" pitchFamily="34" charset="0"/>
-                <a:ea typeface="Inter" pitchFamily="34" charset="-122"/>
-                <a:cs typeface="Inter" pitchFamily="34" charset="-120"/>
-              </a:rPr>
-              <a:t>BASE DE DATOS</a:t>
-            </a:r>
-            <a:endParaRPr lang="en-US" sz="1100" dirty="0"/>
-          </a:p>
-        </p:txBody>
-      </p:sp>
-      <p:sp>
-        <p:nvSpPr>
-          <p:cNvPr id="8" name="Text 6"/>
-          <p:cNvSpPr/>
-          <p:nvPr/>
-        </p:nvSpPr>
-        <p:spPr>
-          <a:xfrm>
-            <a:off x="457200" y="1298448"/>
-            <a:ext cx="11247120" cy="777240"/>
-          </a:xfrm>
-          <a:prstGeom prst="rect">
-            <a:avLst/>
-          </a:prstGeom>
-          <a:noFill/>
-          <a:ln/>
-        </p:spPr>
-        <p:txBody>
-          <a:bodyPr wrap="square" lIns="0" tIns="0" rIns="0" bIns="0" rtlCol="0" anchor="ctr"/>
-          <a:lstStyle/>
-          <a:p>
-            <a:pPr marL="0" indent="0">
-              <a:buNone/>
-            </a:pPr>
-            <a:r>
-              <a:rPr lang="en-US" sz="3200" b="1" dirty="0">
-                <a:solidFill>
-                  <a:srgbClr val="1F3528"/>
-                </a:solidFill>
-                <a:latin typeface="Plus Jakarta Sans" pitchFamily="34" charset="0"/>
-                <a:ea typeface="Plus Jakarta Sans" pitchFamily="34" charset="-122"/>
-                <a:cs typeface="Plus Jakarta Sans" pitchFamily="34" charset="-120"/>
-              </a:rPr>
-              <a:t>Scripts T-SQL versionados</a:t>
-            </a:r>
-            <a:endParaRPr lang="en-US" sz="3200" dirty="0"/>
-          </a:p>
-        </p:txBody>
-      </p:sp>
-      <p:sp>
-        <p:nvSpPr>
-          <p:cNvPr id="9" name="Shape 7"/>
-          <p:cNvSpPr/>
-          <p:nvPr/>
-        </p:nvSpPr>
-        <p:spPr>
-          <a:xfrm>
-            <a:off x="457200" y="2331720"/>
-            <a:ext cx="5669280" cy="411480"/>
-          </a:xfrm>
-          <a:prstGeom prst="rect">
-            <a:avLst/>
-          </a:prstGeom>
-          <a:solidFill>
-            <a:srgbClr val="FFFFFF"/>
-          </a:solidFill>
-          <a:ln w="12700">
-            <a:solidFill>
-              <a:srgbClr val="D9D5CB"/>
-            </a:solidFill>
-            <a:prstDash val="solid"/>
-          </a:ln>
-        </p:spPr>
-      </p:sp>
-      <p:sp>
-        <p:nvSpPr>
-          <p:cNvPr id="10" name="Shape 8"/>
-          <p:cNvSpPr/>
-          <p:nvPr/>
-        </p:nvSpPr>
-        <p:spPr>
-          <a:xfrm>
-            <a:off x="457200" y="2331720"/>
-            <a:ext cx="73152" cy="411480"/>
-          </a:xfrm>
-          <a:prstGeom prst="rect">
-            <a:avLst/>
-          </a:prstGeom>
-          <a:solidFill>
-            <a:srgbClr val="CB6843"/>
-          </a:solidFill>
-          <a:ln w="12700">
-            <a:solidFill>
-              <a:srgbClr val="CB6843"/>
-            </a:solidFill>
-            <a:prstDash val="solid"/>
-          </a:ln>
-        </p:spPr>
-      </p:sp>
-      <p:sp>
-        <p:nvSpPr>
-          <p:cNvPr id="11" name="Text 9"/>
-          <p:cNvSpPr/>
-          <p:nvPr/>
-        </p:nvSpPr>
-        <p:spPr>
-          <a:xfrm>
-            <a:off x="640080" y="2377440"/>
-            <a:ext cx="2377440" cy="320040"/>
-          </a:xfrm>
-          <a:prstGeom prst="rect">
-            <a:avLst/>
-          </a:prstGeom>
-          <a:noFill/>
-          <a:ln/>
-        </p:spPr>
-        <p:txBody>
-          <a:bodyPr wrap="square" lIns="0" tIns="0" rIns="0" bIns="0" rtlCol="0" anchor="ctr"/>
-          <a:lstStyle/>
-          <a:p>
-            <a:pPr marL="0" indent="0">
-              <a:buNone/>
-            </a:pPr>
-            <a:r>
-              <a:rPr lang="en-US" sz="1100" b="1" dirty="0">
-                <a:solidFill>
-                  <a:srgbClr val="1F3528"/>
-                </a:solidFill>
-                <a:latin typeface="Inter" pitchFamily="34" charset="0"/>
-                <a:ea typeface="Inter" pitchFamily="34" charset="-122"/>
-                <a:cs typeface="Inter" pitchFamily="34" charset="-120"/>
-              </a:rPr>
-              <a:t>00_RunAll.sql</a:t>
-            </a:r>
-            <a:endParaRPr lang="en-US" sz="1100" dirty="0"/>
-          </a:p>
-        </p:txBody>
-      </p:sp>
-      <p:sp>
-        <p:nvSpPr>
-          <p:cNvPr id="12" name="Text 10"/>
-          <p:cNvSpPr/>
-          <p:nvPr/>
-        </p:nvSpPr>
-        <p:spPr>
-          <a:xfrm>
-            <a:off x="3063240" y="2377440"/>
-            <a:ext cx="3017520" cy="320040"/>
-          </a:xfrm>
-          <a:prstGeom prst="rect">
-            <a:avLst/>
-          </a:prstGeom>
-          <a:noFill/>
-          <a:ln/>
-        </p:spPr>
-        <p:txBody>
-          <a:bodyPr wrap="square" lIns="0" tIns="0" rIns="0" bIns="0" rtlCol="0" anchor="ctr"/>
-          <a:lstStyle/>
-          <a:p>
-            <a:pPr marL="0" indent="0">
-              <a:buNone/>
-            </a:pPr>
-            <a:r>
-              <a:rPr lang="en-US" sz="1000" dirty="0">
-                <a:solidFill>
-                  <a:srgbClr val="6E6E6E"/>
-                </a:solidFill>
-                <a:latin typeface="Inter" pitchFamily="34" charset="0"/>
-                <a:ea typeface="Inter" pitchFamily="34" charset="-122"/>
-                <a:cs typeface="Inter" pitchFamily="34" charset="-120"/>
-              </a:rPr>
-              <a:t>Instalación completa en un solo paso</a:t>
-            </a:r>
-            <a:endParaRPr lang="en-US" sz="1000" dirty="0"/>
-          </a:p>
-        </p:txBody>
-      </p:sp>
-      <p:sp>
-        <p:nvSpPr>
-          <p:cNvPr id="13" name="Shape 11"/>
-          <p:cNvSpPr/>
-          <p:nvPr/>
-        </p:nvSpPr>
-        <p:spPr>
-          <a:xfrm>
-            <a:off x="457200" y="2834640"/>
-            <a:ext cx="5669280" cy="411480"/>
-          </a:xfrm>
-          <a:prstGeom prst="rect">
-            <a:avLst/>
-          </a:prstGeom>
-          <a:solidFill>
-            <a:srgbClr val="FFFFFF"/>
-          </a:solidFill>
-          <a:ln w="12700">
-            <a:solidFill>
-              <a:srgbClr val="D9D5CB"/>
-            </a:solidFill>
-            <a:prstDash val="solid"/>
-          </a:ln>
-        </p:spPr>
-      </p:sp>
-      <p:sp>
-        <p:nvSpPr>
-          <p:cNvPr id="14" name="Shape 12"/>
-          <p:cNvSpPr/>
-          <p:nvPr/>
-        </p:nvSpPr>
-        <p:spPr>
-          <a:xfrm>
-            <a:off x="457200" y="2834640"/>
-            <a:ext cx="73152" cy="411480"/>
-          </a:xfrm>
-          <a:prstGeom prst="rect">
-            <a:avLst/>
-          </a:prstGeom>
-          <a:solidFill>
-            <a:srgbClr val="CB6843"/>
-          </a:solidFill>
-          <a:ln w="12700">
-            <a:solidFill>
-              <a:srgbClr val="CB6843"/>
-            </a:solidFill>
-            <a:prstDash val="solid"/>
-          </a:ln>
-        </p:spPr>
-      </p:sp>
-      <p:sp>
-        <p:nvSpPr>
-          <p:cNvPr id="15" name="Text 13"/>
-          <p:cNvSpPr/>
-          <p:nvPr/>
-        </p:nvSpPr>
-        <p:spPr>
-          <a:xfrm>
-            <a:off x="640080" y="2880360"/>
-            <a:ext cx="2377440" cy="320040"/>
-          </a:xfrm>
-          <a:prstGeom prst="rect">
-            <a:avLst/>
-          </a:prstGeom>
-          <a:noFill/>
-          <a:ln/>
-        </p:spPr>
-        <p:txBody>
-          <a:bodyPr wrap="square" lIns="0" tIns="0" rIns="0" bIns="0" rtlCol="0" anchor="ctr"/>
-          <a:lstStyle/>
-          <a:p>
-            <a:pPr marL="0" indent="0">
-              <a:buNone/>
-            </a:pPr>
-            <a:r>
-              <a:rPr lang="en-US" sz="1100" b="1" dirty="0">
-                <a:solidFill>
-                  <a:srgbClr val="1F3528"/>
-                </a:solidFill>
-                <a:latin typeface="Inter" pitchFamily="34" charset="0"/>
-                <a:ea typeface="Inter" pitchFamily="34" charset="-122"/>
-                <a:cs typeface="Inter" pitchFamily="34" charset="-120"/>
-              </a:rPr>
-              <a:t>01_CreateDatabase.sql</a:t>
-            </a:r>
-            <a:endParaRPr lang="en-US" sz="1100" dirty="0"/>
-          </a:p>
-        </p:txBody>
-      </p:sp>
-      <p:sp>
-        <p:nvSpPr>
-          <p:cNvPr id="16" name="Text 14"/>
-          <p:cNvSpPr/>
-          <p:nvPr/>
-        </p:nvSpPr>
-        <p:spPr>
-          <a:xfrm>
-            <a:off x="3063240" y="2880360"/>
-            <a:ext cx="3017520" cy="320040"/>
-          </a:xfrm>
-          <a:prstGeom prst="rect">
-            <a:avLst/>
-          </a:prstGeom>
-          <a:noFill/>
-          <a:ln/>
-        </p:spPr>
-        <p:txBody>
-          <a:bodyPr wrap="square" lIns="0" tIns="0" rIns="0" bIns="0" rtlCol="0" anchor="ctr"/>
-          <a:lstStyle/>
-          <a:p>
-            <a:pPr marL="0" indent="0">
-              <a:buNone/>
-            </a:pPr>
-            <a:r>
-              <a:rPr lang="en-US" sz="1000" dirty="0">
-                <a:solidFill>
-                  <a:srgbClr val="6E6E6E"/>
-                </a:solidFill>
-                <a:latin typeface="Inter" pitchFamily="34" charset="0"/>
-                <a:ea typeface="Inter" pitchFamily="34" charset="-122"/>
-                <a:cs typeface="Inter" pitchFamily="34" charset="-120"/>
-              </a:rPr>
-              <a:t>Crea la base UnidadHabitacionalDB</a:t>
-            </a:r>
-            <a:endParaRPr lang="en-US" sz="1000" dirty="0"/>
-          </a:p>
-        </p:txBody>
-      </p:sp>
-      <p:sp>
-        <p:nvSpPr>
-          <p:cNvPr id="17" name="Shape 15"/>
-          <p:cNvSpPr/>
-          <p:nvPr/>
-        </p:nvSpPr>
-        <p:spPr>
-          <a:xfrm>
-            <a:off x="457200" y="3337560"/>
-            <a:ext cx="5669280" cy="411480"/>
-          </a:xfrm>
-          <a:prstGeom prst="rect">
-            <a:avLst/>
-          </a:prstGeom>
-          <a:solidFill>
-            <a:srgbClr val="FFFFFF"/>
-          </a:solidFill>
-          <a:ln w="12700">
-            <a:solidFill>
-              <a:srgbClr val="D9D5CB"/>
-            </a:solidFill>
-            <a:prstDash val="solid"/>
-          </a:ln>
-        </p:spPr>
-      </p:sp>
-      <p:sp>
-        <p:nvSpPr>
-          <p:cNvPr id="18" name="Shape 16"/>
-          <p:cNvSpPr/>
-          <p:nvPr/>
-        </p:nvSpPr>
-        <p:spPr>
-          <a:xfrm>
-            <a:off x="457200" y="3337560"/>
-            <a:ext cx="73152" cy="411480"/>
-          </a:xfrm>
-          <a:prstGeom prst="rect">
-            <a:avLst/>
-          </a:prstGeom>
-          <a:solidFill>
-            <a:srgbClr val="CB6843"/>
-          </a:solidFill>
-          <a:ln w="12700">
-            <a:solidFill>
-              <a:srgbClr val="CB6843"/>
-            </a:solidFill>
-            <a:prstDash val="solid"/>
-          </a:ln>
-        </p:spPr>
-      </p:sp>
-      <p:sp>
-        <p:nvSpPr>
-          <p:cNvPr id="19" name="Text 17"/>
-          <p:cNvSpPr/>
-          <p:nvPr/>
-        </p:nvSpPr>
-        <p:spPr>
-          <a:xfrm>
-            <a:off x="640080" y="3383280"/>
-            <a:ext cx="2377440" cy="320040"/>
-          </a:xfrm>
-          <a:prstGeom prst="rect">
-            <a:avLst/>
-          </a:prstGeom>
-          <a:noFill/>
-          <a:ln/>
-        </p:spPr>
-        <p:txBody>
-          <a:bodyPr wrap="square" lIns="0" tIns="0" rIns="0" bIns="0" rtlCol="0" anchor="ctr"/>
-          <a:lstStyle/>
-          <a:p>
-            <a:pPr marL="0" indent="0">
-              <a:buNone/>
-            </a:pPr>
-            <a:r>
-              <a:rPr lang="en-US" sz="1100" b="1" dirty="0">
-                <a:solidFill>
-                  <a:srgbClr val="1F3528"/>
-                </a:solidFill>
-                <a:latin typeface="Inter" pitchFamily="34" charset="0"/>
-                <a:ea typeface="Inter" pitchFamily="34" charset="-122"/>
-                <a:cs typeface="Inter" pitchFamily="34" charset="-120"/>
-              </a:rPr>
-              <a:t>02_CreateTables.sql</a:t>
-            </a:r>
-            <a:endParaRPr lang="en-US" sz="1100" dirty="0"/>
-          </a:p>
-        </p:txBody>
-      </p:sp>
-      <p:sp>
-        <p:nvSpPr>
-          <p:cNvPr id="20" name="Text 18"/>
-          <p:cNvSpPr/>
-          <p:nvPr/>
-        </p:nvSpPr>
-        <p:spPr>
-          <a:xfrm>
-            <a:off x="3063240" y="3383280"/>
-            <a:ext cx="3017520" cy="320040"/>
-          </a:xfrm>
-          <a:prstGeom prst="rect">
-            <a:avLst/>
-          </a:prstGeom>
-          <a:noFill/>
-          <a:ln/>
-        </p:spPr>
-        <p:txBody>
-          <a:bodyPr wrap="square" lIns="0" tIns="0" rIns="0" bIns="0" rtlCol="0" anchor="ctr"/>
-          <a:lstStyle/>
-          <a:p>
-            <a:pPr marL="0" indent="0">
-              <a:buNone/>
-            </a:pPr>
-            <a:r>
-              <a:rPr lang="en-US" sz="1000" dirty="0">
-                <a:solidFill>
-                  <a:srgbClr val="6E6E6E"/>
-                </a:solidFill>
-                <a:latin typeface="Inter" pitchFamily="34" charset="0"/>
-                <a:ea typeface="Inter" pitchFamily="34" charset="-122"/>
-                <a:cs typeface="Inter" pitchFamily="34" charset="-120"/>
-              </a:rPr>
-              <a:t>9 tablas con PK, FK y constraints</a:t>
-            </a:r>
-            <a:endParaRPr lang="en-US" sz="1000" dirty="0"/>
-          </a:p>
-        </p:txBody>
-      </p:sp>
-      <p:sp>
-        <p:nvSpPr>
-          <p:cNvPr id="21" name="Shape 19"/>
-          <p:cNvSpPr/>
-          <p:nvPr/>
-        </p:nvSpPr>
-        <p:spPr>
-          <a:xfrm>
-            <a:off x="457200" y="3840480"/>
-            <a:ext cx="5669280" cy="411480"/>
-          </a:xfrm>
-          <a:prstGeom prst="rect">
-            <a:avLst/>
-          </a:prstGeom>
-          <a:solidFill>
-            <a:srgbClr val="FFFFFF"/>
-          </a:solidFill>
-          <a:ln w="12700">
-            <a:solidFill>
-              <a:srgbClr val="D9D5CB"/>
-            </a:solidFill>
-            <a:prstDash val="solid"/>
-          </a:ln>
-        </p:spPr>
-      </p:sp>
-      <p:sp>
-        <p:nvSpPr>
-          <p:cNvPr id="22" name="Shape 20"/>
-          <p:cNvSpPr/>
-          <p:nvPr/>
-        </p:nvSpPr>
-        <p:spPr>
-          <a:xfrm>
-            <a:off x="457200" y="3840480"/>
-            <a:ext cx="73152" cy="411480"/>
-          </a:xfrm>
-          <a:prstGeom prst="rect">
-            <a:avLst/>
-          </a:prstGeom>
-          <a:solidFill>
-            <a:srgbClr val="CB6843"/>
-          </a:solidFill>
-          <a:ln w="12700">
-            <a:solidFill>
-              <a:srgbClr val="CB6843"/>
-            </a:solidFill>
-            <a:prstDash val="solid"/>
-          </a:ln>
-        </p:spPr>
-      </p:sp>
-      <p:sp>
-        <p:nvSpPr>
-          <p:cNvPr id="23" name="Text 21"/>
-          <p:cNvSpPr/>
-          <p:nvPr/>
-        </p:nvSpPr>
-        <p:spPr>
-          <a:xfrm>
-            <a:off x="640080" y="3886200"/>
-            <a:ext cx="2377440" cy="320040"/>
-          </a:xfrm>
-          <a:prstGeom prst="rect">
-            <a:avLst/>
-          </a:prstGeom>
-          <a:noFill/>
-          <a:ln/>
-        </p:spPr>
-        <p:txBody>
-          <a:bodyPr wrap="square" lIns="0" tIns="0" rIns="0" bIns="0" rtlCol="0" anchor="ctr"/>
-          <a:lstStyle/>
-          <a:p>
-            <a:pPr marL="0" indent="0">
-              <a:buNone/>
-            </a:pPr>
-            <a:r>
-              <a:rPr lang="en-US" sz="1100" b="1" dirty="0">
-                <a:solidFill>
-                  <a:srgbClr val="1F3528"/>
-                </a:solidFill>
-                <a:latin typeface="Inter" pitchFamily="34" charset="0"/>
-                <a:ea typeface="Inter" pitchFamily="34" charset="-122"/>
-                <a:cs typeface="Inter" pitchFamily="34" charset="-120"/>
-              </a:rPr>
-              <a:t>03_SeedData.sql</a:t>
-            </a:r>
-            <a:endParaRPr lang="en-US" sz="1100" dirty="0"/>
-          </a:p>
-        </p:txBody>
-      </p:sp>
-      <p:sp>
-        <p:nvSpPr>
-          <p:cNvPr id="24" name="Text 22"/>
-          <p:cNvSpPr/>
-          <p:nvPr/>
-        </p:nvSpPr>
-        <p:spPr>
-          <a:xfrm>
-            <a:off x="3063240" y="3886200"/>
-            <a:ext cx="3017520" cy="320040"/>
-          </a:xfrm>
-          <a:prstGeom prst="rect">
-            <a:avLst/>
-          </a:prstGeom>
-          <a:noFill/>
-          <a:ln/>
-        </p:spPr>
-        <p:txBody>
-          <a:bodyPr wrap="square" lIns="0" tIns="0" rIns="0" bIns="0" rtlCol="0" anchor="ctr"/>
-          <a:lstStyle/>
-          <a:p>
-            <a:pPr marL="0" indent="0">
-              <a:buNone/>
-            </a:pPr>
-            <a:r>
-              <a:rPr lang="en-US" sz="1000" dirty="0">
-                <a:solidFill>
-                  <a:srgbClr val="6E6E6E"/>
-                </a:solidFill>
-                <a:latin typeface="Inter" pitchFamily="34" charset="0"/>
-                <a:ea typeface="Inter" pitchFamily="34" charset="-122"/>
-                <a:cs typeface="Inter" pitchFamily="34" charset="-120"/>
-              </a:rPr>
-              <a:t>Datos semilla (admin, catálogos)</a:t>
-            </a:r>
-            <a:endParaRPr lang="en-US" sz="1000" dirty="0"/>
-          </a:p>
-        </p:txBody>
-      </p:sp>
-      <p:sp>
-        <p:nvSpPr>
-          <p:cNvPr id="25" name="Shape 23"/>
-          <p:cNvSpPr/>
-          <p:nvPr/>
-        </p:nvSpPr>
-        <p:spPr>
-          <a:xfrm>
-            <a:off x="457200" y="4343400"/>
-            <a:ext cx="5669280" cy="411480"/>
-          </a:xfrm>
-          <a:prstGeom prst="rect">
-            <a:avLst/>
-          </a:prstGeom>
-          <a:solidFill>
-            <a:srgbClr val="FFFFFF"/>
-          </a:solidFill>
-          <a:ln w="12700">
-            <a:solidFill>
-              <a:srgbClr val="D9D5CB"/>
-            </a:solidFill>
-            <a:prstDash val="solid"/>
-          </a:ln>
-        </p:spPr>
-      </p:sp>
-      <p:sp>
-        <p:nvSpPr>
-          <p:cNvPr id="26" name="Shape 24"/>
-          <p:cNvSpPr/>
-          <p:nvPr/>
-        </p:nvSpPr>
-        <p:spPr>
-          <a:xfrm>
-            <a:off x="457200" y="4343400"/>
-            <a:ext cx="73152" cy="411480"/>
-          </a:xfrm>
-          <a:prstGeom prst="rect">
-            <a:avLst/>
-          </a:prstGeom>
-          <a:solidFill>
-            <a:srgbClr val="CB6843"/>
-          </a:solidFill>
-          <a:ln w="12700">
-            <a:solidFill>
-              <a:srgbClr val="CB6843"/>
-            </a:solidFill>
-            <a:prstDash val="solid"/>
-          </a:ln>
-        </p:spPr>
-      </p:sp>
-      <p:sp>
-        <p:nvSpPr>
-          <p:cNvPr id="27" name="Text 25"/>
-          <p:cNvSpPr/>
-          <p:nvPr/>
-        </p:nvSpPr>
-        <p:spPr>
-          <a:xfrm>
-            <a:off x="640080" y="4389120"/>
-            <a:ext cx="2377440" cy="320040"/>
-          </a:xfrm>
-          <a:prstGeom prst="rect">
-            <a:avLst/>
-          </a:prstGeom>
-          <a:noFill/>
-          <a:ln/>
-        </p:spPr>
-        <p:txBody>
-          <a:bodyPr wrap="square" lIns="0" tIns="0" rIns="0" bIns="0" rtlCol="0" anchor="ctr"/>
-          <a:lstStyle/>
-          <a:p>
-            <a:pPr marL="0" indent="0">
-              <a:buNone/>
-            </a:pPr>
-            <a:r>
-              <a:rPr lang="en-US" sz="1100" b="1" dirty="0">
-                <a:solidFill>
-                  <a:srgbClr val="1F3528"/>
-                </a:solidFill>
-                <a:latin typeface="Inter" pitchFamily="34" charset="0"/>
-                <a:ea typeface="Inter" pitchFamily="34" charset="-122"/>
-                <a:cs typeface="Inter" pitchFamily="34" charset="-120"/>
-              </a:rPr>
-              <a:t>04_DropDatabase.sql</a:t>
-            </a:r>
-            <a:endParaRPr lang="en-US" sz="1100" dirty="0"/>
-          </a:p>
-        </p:txBody>
-      </p:sp>
-      <p:sp>
-        <p:nvSpPr>
-          <p:cNvPr id="28" name="Text 26"/>
-          <p:cNvSpPr/>
-          <p:nvPr/>
-        </p:nvSpPr>
-        <p:spPr>
-          <a:xfrm>
-            <a:off x="3063240" y="4389120"/>
-            <a:ext cx="3017520" cy="320040"/>
-          </a:xfrm>
-          <a:prstGeom prst="rect">
-            <a:avLst/>
-          </a:prstGeom>
-          <a:noFill/>
-          <a:ln/>
-        </p:spPr>
-        <p:txBody>
-          <a:bodyPr wrap="square" lIns="0" tIns="0" rIns="0" bIns="0" rtlCol="0" anchor="ctr"/>
-          <a:lstStyle/>
-          <a:p>
-            <a:pPr marL="0" indent="0">
-              <a:buNone/>
-            </a:pPr>
-            <a:r>
-              <a:rPr lang="en-US" sz="1000" dirty="0">
-                <a:solidFill>
-                  <a:srgbClr val="6E6E6E"/>
-                </a:solidFill>
-                <a:latin typeface="Inter" pitchFamily="34" charset="0"/>
-                <a:ea typeface="Inter" pitchFamily="34" charset="-122"/>
-                <a:cs typeface="Inter" pitchFamily="34" charset="-120"/>
-              </a:rPr>
-              <a:t>Limpieza completa para reinstalar</a:t>
-            </a:r>
-            <a:endParaRPr lang="en-US" sz="1000" dirty="0"/>
-          </a:p>
-        </p:txBody>
-      </p:sp>
-      <p:sp>
-        <p:nvSpPr>
-          <p:cNvPr id="29" name="Shape 27"/>
-          <p:cNvSpPr/>
-          <p:nvPr/>
-        </p:nvSpPr>
-        <p:spPr>
-          <a:xfrm>
-            <a:off x="457200" y="4846320"/>
-            <a:ext cx="5669280" cy="411480"/>
-          </a:xfrm>
-          <a:prstGeom prst="rect">
-            <a:avLst/>
-          </a:prstGeom>
-          <a:solidFill>
-            <a:srgbClr val="FFFFFF"/>
-          </a:solidFill>
-          <a:ln w="12700">
-            <a:solidFill>
-              <a:srgbClr val="D9D5CB"/>
-            </a:solidFill>
-            <a:prstDash val="solid"/>
-          </a:ln>
-        </p:spPr>
-      </p:sp>
-      <p:sp>
-        <p:nvSpPr>
-          <p:cNvPr id="30" name="Shape 28"/>
-          <p:cNvSpPr/>
-          <p:nvPr/>
-        </p:nvSpPr>
-        <p:spPr>
-          <a:xfrm>
-            <a:off x="457200" y="4846320"/>
-            <a:ext cx="73152" cy="411480"/>
-          </a:xfrm>
-          <a:prstGeom prst="rect">
-            <a:avLst/>
-          </a:prstGeom>
-          <a:solidFill>
-            <a:srgbClr val="CB6843"/>
-          </a:solidFill>
-          <a:ln w="12700">
-            <a:solidFill>
-              <a:srgbClr val="CB6843"/>
-            </a:solidFill>
-            <a:prstDash val="solid"/>
-          </a:ln>
-        </p:spPr>
-      </p:sp>
-      <p:sp>
-        <p:nvSpPr>
-          <p:cNvPr id="31" name="Text 29"/>
-          <p:cNvSpPr/>
-          <p:nvPr/>
-        </p:nvSpPr>
-        <p:spPr>
-          <a:xfrm>
-            <a:off x="640080" y="4892040"/>
-            <a:ext cx="2377440" cy="320040"/>
-          </a:xfrm>
-          <a:prstGeom prst="rect">
-            <a:avLst/>
-          </a:prstGeom>
-          <a:noFill/>
-          <a:ln/>
-        </p:spPr>
-        <p:txBody>
-          <a:bodyPr wrap="square" lIns="0" tIns="0" rIns="0" bIns="0" rtlCol="0" anchor="ctr"/>
-          <a:lstStyle/>
-          <a:p>
-            <a:pPr marL="0" indent="0">
-              <a:buNone/>
-            </a:pPr>
-            <a:r>
-              <a:rPr lang="en-US" sz="1100" b="1" dirty="0">
-                <a:solidFill>
-                  <a:srgbClr val="1F3528"/>
-                </a:solidFill>
-                <a:latin typeface="Inter" pitchFamily="34" charset="0"/>
-                <a:ea typeface="Inter" pitchFamily="34" charset="-122"/>
-                <a:cs typeface="Inter" pitchFamily="34" charset="-120"/>
-              </a:rPr>
-              <a:t>05_AddSesionTable.sql</a:t>
-            </a:r>
-            <a:endParaRPr lang="en-US" sz="1100" dirty="0"/>
-          </a:p>
-        </p:txBody>
-      </p:sp>
-      <p:sp>
-        <p:nvSpPr>
-          <p:cNvPr id="32" name="Text 30"/>
-          <p:cNvSpPr/>
-          <p:nvPr/>
-        </p:nvSpPr>
-        <p:spPr>
-          <a:xfrm>
-            <a:off x="3063240" y="4892040"/>
-            <a:ext cx="3017520" cy="320040"/>
-          </a:xfrm>
-          <a:prstGeom prst="rect">
-            <a:avLst/>
-          </a:prstGeom>
-          <a:noFill/>
-          <a:ln/>
-        </p:spPr>
-        <p:txBody>
-          <a:bodyPr wrap="square" lIns="0" tIns="0" rIns="0" bIns="0" rtlCol="0" anchor="ctr"/>
-          <a:lstStyle/>
-          <a:p>
-            <a:pPr marL="0" indent="0">
-              <a:buNone/>
-            </a:pPr>
-            <a:r>
-              <a:rPr lang="en-US" sz="1000" dirty="0">
-                <a:solidFill>
-                  <a:srgbClr val="6E6E6E"/>
-                </a:solidFill>
-                <a:latin typeface="Inter" pitchFamily="34" charset="0"/>
-                <a:ea typeface="Inter" pitchFamily="34" charset="-122"/>
-                <a:cs typeface="Inter" pitchFamily="34" charset="-120"/>
-              </a:rPr>
-              <a:t>Migración incremental de Sesion</a:t>
-            </a:r>
-            <a:endParaRPr lang="en-US" sz="1000" dirty="0"/>
-          </a:p>
-        </p:txBody>
-      </p:sp>
-      <p:sp>
-        <p:nvSpPr>
-          <p:cNvPr id="33" name="Shape 31"/>
-          <p:cNvSpPr/>
-          <p:nvPr/>
-        </p:nvSpPr>
-        <p:spPr>
-          <a:xfrm>
-            <a:off x="6400800" y="2331720"/>
-            <a:ext cx="5303520" cy="3291840"/>
-          </a:xfrm>
-          <a:prstGeom prst="rect">
-            <a:avLst/>
-          </a:prstGeom>
-          <a:solidFill>
-            <a:srgbClr val="1F3528"/>
-          </a:solidFill>
-          <a:ln w="12700">
-            <a:solidFill>
-              <a:srgbClr val="1F3528"/>
-            </a:solidFill>
-            <a:prstDash val="solid"/>
-          </a:ln>
-        </p:spPr>
-      </p:sp>
-      <p:sp>
-        <p:nvSpPr>
-          <p:cNvPr id="34" name="Text 32"/>
-          <p:cNvSpPr/>
-          <p:nvPr/>
-        </p:nvSpPr>
-        <p:spPr>
-          <a:xfrm>
-            <a:off x="6629400" y="2514600"/>
-            <a:ext cx="4846320" cy="274320"/>
-          </a:xfrm>
-          <a:prstGeom prst="rect">
-            <a:avLst/>
-          </a:prstGeom>
-          <a:noFill/>
-          <a:ln/>
-        </p:spPr>
-        <p:txBody>
-          <a:bodyPr wrap="square" lIns="0" tIns="0" rIns="0" bIns="0" rtlCol="0" anchor="ctr"/>
-          <a:lstStyle/>
-          <a:p>
-            <a:pPr marL="0" indent="0">
-              <a:buNone/>
-            </a:pPr>
-            <a:r>
-              <a:rPr lang="en-US" sz="1100" b="1" kern="0" spc="300" dirty="0">
-                <a:solidFill>
-                  <a:srgbClr val="CB6843"/>
-                </a:solidFill>
-                <a:latin typeface="Inter" pitchFamily="34" charset="0"/>
-                <a:ea typeface="Inter" pitchFamily="34" charset="-122"/>
-                <a:cs typeface="Inter" pitchFamily="34" charset="-120"/>
-              </a:rPr>
-              <a:t>INSTALACIÓN NUEVA</a:t>
-            </a:r>
-            <a:endParaRPr lang="en-US" sz="1100" dirty="0"/>
-          </a:p>
-        </p:txBody>
-      </p:sp>
-      <p:sp>
-        <p:nvSpPr>
-          <p:cNvPr id="35" name="Text 33"/>
-          <p:cNvSpPr/>
-          <p:nvPr/>
-        </p:nvSpPr>
-        <p:spPr>
-          <a:xfrm>
-            <a:off x="6629400" y="2834640"/>
-            <a:ext cx="4846320" cy="868680"/>
-          </a:xfrm>
-          <a:prstGeom prst="rect">
-            <a:avLst/>
-          </a:prstGeom>
-          <a:noFill/>
-          <a:ln/>
-        </p:spPr>
-        <p:txBody>
-          <a:bodyPr wrap="square" lIns="0" tIns="0" rIns="0" bIns="0" rtlCol="0" anchor="ctr"/>
-          <a:lstStyle/>
-          <a:p>
-            <a:pPr marL="0" indent="0">
-              <a:buNone/>
-            </a:pPr>
-            <a:r>
-              <a:rPr lang="en-US" sz="1200" dirty="0">
-                <a:solidFill>
-                  <a:srgbClr val="FFFFFF"/>
-                </a:solidFill>
-                <a:latin typeface="Courier New" pitchFamily="34" charset="0"/>
-                <a:ea typeface="Courier New" pitchFamily="34" charset="-122"/>
-                <a:cs typeface="Courier New" pitchFamily="34" charset="-120"/>
-              </a:rPr>
-              <a:t>sqlcmd -S localhost\SQLEXPRESS -E</a:t>
-            </a:r>
-            <a:endParaRPr lang="en-US" sz="1200" dirty="0"/>
-          </a:p>
-          <a:p>
-            <a:pPr marL="0" indent="0">
-              <a:buNone/>
-            </a:pPr>
-            <a:r>
-              <a:rPr lang="en-US" sz="1200" dirty="0">
-                <a:solidFill>
-                  <a:srgbClr val="FFFFFF"/>
-                </a:solidFill>
-                <a:latin typeface="Courier New" pitchFamily="34" charset="0"/>
-                <a:ea typeface="Courier New" pitchFamily="34" charset="-122"/>
-                <a:cs typeface="Courier New" pitchFamily="34" charset="-120"/>
-              </a:rPr>
-              <a:t>        -i Database\00_RunAll.sql</a:t>
-            </a:r>
-            <a:endParaRPr lang="en-US" sz="1200" dirty="0"/>
-          </a:p>
-        </p:txBody>
-      </p:sp>
-      <p:sp>
-        <p:nvSpPr>
-          <p:cNvPr id="36" name="Text 34"/>
-          <p:cNvSpPr/>
-          <p:nvPr/>
-        </p:nvSpPr>
-        <p:spPr>
-          <a:xfrm>
-            <a:off x="6629400" y="3840480"/>
-            <a:ext cx="4846320" cy="274320"/>
-          </a:xfrm>
-          <a:prstGeom prst="rect">
-            <a:avLst/>
-          </a:prstGeom>
-          <a:noFill/>
-          <a:ln/>
-        </p:spPr>
-        <p:txBody>
-          <a:bodyPr wrap="square" lIns="0" tIns="0" rIns="0" bIns="0" rtlCol="0" anchor="ctr"/>
-          <a:lstStyle/>
-          <a:p>
-            <a:pPr marL="0" indent="0">
-              <a:buNone/>
-            </a:pPr>
-            <a:r>
-              <a:rPr lang="en-US" sz="1100" b="1" kern="0" spc="300" dirty="0">
-                <a:solidFill>
-                  <a:srgbClr val="CB6843"/>
-                </a:solidFill>
-                <a:latin typeface="Inter" pitchFamily="34" charset="0"/>
-                <a:ea typeface="Inter" pitchFamily="34" charset="-122"/>
-                <a:cs typeface="Inter" pitchFamily="34" charset="-120"/>
-              </a:rPr>
-              <a:t>ACTUALIZACIÓN DE BD EXISTENTE</a:t>
-            </a:r>
-            <a:endParaRPr lang="en-US" sz="1100" dirty="0"/>
-          </a:p>
-        </p:txBody>
-      </p:sp>
-      <p:sp>
-        <p:nvSpPr>
-          <p:cNvPr id="37" name="Text 35"/>
-          <p:cNvSpPr/>
-          <p:nvPr/>
-        </p:nvSpPr>
-        <p:spPr>
-          <a:xfrm>
-            <a:off x="6629400" y="4160520"/>
-            <a:ext cx="4846320" cy="1280160"/>
-          </a:xfrm>
-          <a:prstGeom prst="rect">
-            <a:avLst/>
-          </a:prstGeom>
-          <a:noFill/>
-          <a:ln/>
-        </p:spPr>
-        <p:txBody>
-          <a:bodyPr wrap="square" lIns="0" tIns="0" rIns="0" bIns="0" rtlCol="0" anchor="ctr"/>
-          <a:lstStyle/>
-          <a:p>
-            <a:pPr marL="0" indent="0">
-              <a:buNone/>
-            </a:pPr>
-            <a:r>
-              <a:rPr lang="en-US" sz="1200" dirty="0">
-                <a:solidFill>
-                  <a:srgbClr val="FFFFFF"/>
-                </a:solidFill>
-                <a:latin typeface="Courier New" pitchFamily="34" charset="0"/>
-                <a:ea typeface="Courier New" pitchFamily="34" charset="-122"/>
-                <a:cs typeface="Courier New" pitchFamily="34" charset="-120"/>
-              </a:rPr>
-              <a:t>sqlcmd -S localhost\SQLEXPRESS -E</a:t>
-            </a:r>
-            <a:endParaRPr lang="en-US" sz="1200" dirty="0"/>
-          </a:p>
-          <a:p>
-            <a:pPr marL="0" indent="0">
-              <a:buNone/>
-            </a:pPr>
-            <a:r>
-              <a:rPr lang="en-US" sz="1200" dirty="0">
-                <a:solidFill>
-                  <a:srgbClr val="FFFFFF"/>
-                </a:solidFill>
-                <a:latin typeface="Courier New" pitchFamily="34" charset="0"/>
-                <a:ea typeface="Courier New" pitchFamily="34" charset="-122"/>
-                <a:cs typeface="Courier New" pitchFamily="34" charset="-120"/>
-              </a:rPr>
-              <a:t>        -d UnidadHabitacionalDB</a:t>
-            </a:r>
-            <a:endParaRPr lang="en-US" sz="1200" dirty="0"/>
-          </a:p>
-          <a:p>
-            <a:pPr marL="0" indent="0">
-              <a:buNone/>
-            </a:pPr>
-            <a:r>
-              <a:rPr lang="en-US" sz="1200" dirty="0">
-                <a:solidFill>
-                  <a:srgbClr val="FFFFFF"/>
-                </a:solidFill>
-                <a:latin typeface="Courier New" pitchFamily="34" charset="0"/>
-                <a:ea typeface="Courier New" pitchFamily="34" charset="-122"/>
-                <a:cs typeface="Courier New" pitchFamily="34" charset="-120"/>
-              </a:rPr>
-              <a:t>        -i Database\05_AddSesionTable.sql</a:t>
-            </a:r>
-            <a:endParaRPr lang="en-US" sz="1200" dirty="0"/>
-          </a:p>
-        </p:txBody>
-      </p:sp>
-      <p:sp>
-        <p:nvSpPr>
-          <p:cNvPr id="38" name="Text 36"/>
-          <p:cNvSpPr/>
-          <p:nvPr/>
-        </p:nvSpPr>
-        <p:spPr>
-          <a:xfrm>
-            <a:off x="457200" y="5806440"/>
-            <a:ext cx="11247120" cy="320040"/>
-          </a:xfrm>
-          <a:prstGeom prst="rect">
-            <a:avLst/>
-          </a:prstGeom>
-          <a:noFill/>
-          <a:ln/>
-        </p:spPr>
-        <p:txBody>
-          <a:bodyPr wrap="square" lIns="0" tIns="0" rIns="0" bIns="0" rtlCol="0" anchor="ctr"/>
-          <a:lstStyle/>
-          <a:p>
-            <a:pPr marL="0" indent="0">
-              <a:buNone/>
-            </a:pPr>
-            <a:r>
-              <a:rPr lang="en-US" sz="1000" i="1" dirty="0">
-                <a:solidFill>
-                  <a:srgbClr val="6E6E6E"/>
-                </a:solidFill>
-                <a:latin typeface="Inter" pitchFamily="34" charset="0"/>
-                <a:ea typeface="Inter" pitchFamily="34" charset="-122"/>
-                <a:cs typeface="Inter" pitchFamily="34" charset="-120"/>
-              </a:rPr>
-              <a:t>Cadena de conexión por defecto: Server=localhost\SQLEXPRESS; Database=UnidadHabitacionalDB; Trusted_Connection=True;</a:t>
-            </a:r>
-            <a:endParaRPr lang="en-US" sz="1000" dirty="0"/>
-          </a:p>
-        </p:txBody>
-      </p:sp>
-      <p:sp>
-        <p:nvSpPr>
-          <p:cNvPr id="39" name="Text 37"/>
-          <p:cNvSpPr/>
-          <p:nvPr/>
-        </p:nvSpPr>
-        <p:spPr>
-          <a:xfrm>
-            <a:off x="457200" y="6492240"/>
-            <a:ext cx="7315200" cy="274320"/>
-          </a:xfrm>
-          <a:prstGeom prst="rect">
-            <a:avLst/>
-          </a:prstGeom>
-          <a:noFill/>
-          <a:ln/>
-        </p:spPr>
-        <p:txBody>
-          <a:bodyPr wrap="square" lIns="0" tIns="0" rIns="0" bIns="0" rtlCol="0" anchor="ctr"/>
-          <a:lstStyle/>
-          <a:p>
-            <a:pPr marL="0" indent="0">
-              <a:buNone/>
-            </a:pPr>
-            <a:r>
-              <a:rPr lang="en-US" sz="800" dirty="0">
-                <a:solidFill>
-                  <a:srgbClr val="6E6E6E"/>
-                </a:solidFill>
-                <a:latin typeface="Inter" pitchFamily="34" charset="0"/>
-                <a:ea typeface="Inter" pitchFamily="34" charset="-122"/>
-                <a:cs typeface="Inter" pitchFamily="34" charset="-120"/>
-              </a:rPr>
-              <a:t>UHabitacional · Sistema de Gestión de Accesos</a:t>
-            </a:r>
-            <a:endParaRPr lang="en-US" sz="800" dirty="0"/>
-          </a:p>
-        </p:txBody>
-      </p:sp>
-      <p:sp>
-        <p:nvSpPr>
-          <p:cNvPr id="40" name="Text 38"/>
-          <p:cNvSpPr/>
-          <p:nvPr/>
-        </p:nvSpPr>
-        <p:spPr>
-          <a:xfrm>
-            <a:off x="11338560" y="6492240"/>
-            <a:ext cx="365760" cy="274320"/>
-          </a:xfrm>
-          <a:prstGeom prst="rect">
-            <a:avLst/>
-          </a:prstGeom>
-          <a:noFill/>
-          <a:ln/>
-        </p:spPr>
-        <p:txBody>
-          <a:bodyPr wrap="square" lIns="0" tIns="0" rIns="0" bIns="0" rtlCol="0" anchor="ctr"/>
-          <a:lstStyle/>
-          <a:p>
-            <a:pPr marL="0" indent="0" algn="r">
-              <a:buNone/>
-            </a:pPr>
-            <a:r>
-              <a:rPr lang="en-US" sz="800" dirty="0">
-                <a:solidFill>
-                  <a:srgbClr val="6E6E6E"/>
-                </a:solidFill>
-                <a:latin typeface="Inter" pitchFamily="34" charset="0"/>
-                <a:ea typeface="Inter" pitchFamily="34" charset="-122"/>
-                <a:cs typeface="Inter" pitchFamily="34" charset="-120"/>
-              </a:rPr>
-              <a:t>10</a:t>
-            </a:r>
-            <a:endParaRPr lang="en-US" sz="800" dirty="0"/>
-          </a:p>
-        </p:txBody>
-      </p:sp>
-    </p:spTree>
-  </p:cSld>
-  <p:clrMapOvr>
-    <a:masterClrMapping/>
-  </p:clrMapOvr>
-</p:sld>
-</file>
-
-<file path=ppt/slides/slide11.xml><?xml version="1.0" encoding="utf-8"?>
-<p:sld xmlns:a="http://schemas.openxmlformats.org/drawingml/2006/main" xmlns:r="http://schemas.openxmlformats.org/officeDocument/2006/relationships" xmlns:p="http://schemas.openxmlformats.org/presentationml/2006/main">
   <p:cSld name="Slide 11">
     <p:bg>
       <p:bgPr>
@@ -4183,13 +2717,52 @@
       </p:sp>
       <p:sp>
         <p:nvSpPr>
-          <p:cNvPr id="9" name="Shape 7"/>
+          <p:cNvPr id="10" name="Text 8"/>
           <p:cNvSpPr/>
           <p:nvPr/>
         </p:nvSpPr>
         <p:spPr>
           <a:xfrm>
             <a:off x="457200" y="2331720"/>
+            <a:ext cx="640080" cy="640080"/>
+          </a:xfrm>
+          <a:prstGeom prst="rect">
+            <a:avLst/>
+          </a:prstGeom>
+          <a:noFill/>
+          <a:ln/>
+        </p:spPr>
+        <p:txBody>
+          <a:bodyPr wrap="square" lIns="0" tIns="0" rIns="0" bIns="0" rtlCol="0" anchor="ctr"/>
+          <a:lstStyle/>
+          <a:p>
+            <a:pPr marL="0" indent="0" algn="ctr">
+              <a:buNone/>
+            </a:pPr>
+            <a:r>
+              <a:rPr lang="en-US" sz="2200" b="1" dirty="0">
+                <a:solidFill>
+                  <a:srgbClr val="FFFFFF"/>
+                </a:solidFill>
+                <a:latin typeface="Plus Jakarta Sans" pitchFamily="34" charset="0"/>
+                <a:ea typeface="Plus Jakarta Sans" pitchFamily="34" charset="-122"/>
+                <a:cs typeface="Plus Jakarta Sans" pitchFamily="34" charset="-120"/>
+              </a:rPr>
+              <a:t>1</a:t>
+            </a:r>
+            <a:endParaRPr lang="en-US" sz="2200" dirty="0"/>
+          </a:p>
+        </p:txBody>
+      </p:sp>
+      <p:sp>
+        <p:nvSpPr>
+          <p:cNvPr id="14" name="Shape 12"/>
+          <p:cNvSpPr/>
+          <p:nvPr/>
+        </p:nvSpPr>
+        <p:spPr>
+          <a:xfrm>
+            <a:off x="457200" y="2432066"/>
             <a:ext cx="640080" cy="640080"/>
           </a:xfrm>
           <a:prstGeom prst="ellipse">
@@ -4208,13 +2781,13 @@
       </p:sp>
       <p:sp>
         <p:nvSpPr>
-          <p:cNvPr id="10" name="Text 8"/>
-          <p:cNvSpPr/>
-          <p:nvPr/>
-        </p:nvSpPr>
-        <p:spPr>
-          <a:xfrm>
-            <a:off x="457200" y="2331720"/>
+          <p:cNvPr id="15" name="Text 13"/>
+          <p:cNvSpPr/>
+          <p:nvPr/>
+        </p:nvSpPr>
+        <p:spPr>
+          <a:xfrm>
+            <a:off x="457200" y="2432066"/>
             <a:ext cx="640080" cy="640080"/>
           </a:xfrm>
           <a:prstGeom prst="rect">
@@ -4231,7 +2804,7 @@
               <a:buNone/>
             </a:pPr>
             <a:r>
-              <a:rPr lang="en-US" sz="2200" b="1" dirty="0">
+              <a:rPr lang="en-US" sz="2200" b="1" dirty="0" smtClean="0">
                 <a:solidFill>
                   <a:srgbClr val="FFFFFF"/>
                 </a:solidFill>
@@ -4247,13 +2820,13 @@
       </p:sp>
       <p:sp>
         <p:nvSpPr>
-          <p:cNvPr id="11" name="Shape 9"/>
-          <p:cNvSpPr/>
-          <p:nvPr/>
-        </p:nvSpPr>
-        <p:spPr>
-          <a:xfrm>
-            <a:off x="1280160" y="2331720"/>
+          <p:cNvPr id="16" name="Shape 14"/>
+          <p:cNvSpPr/>
+          <p:nvPr/>
+        </p:nvSpPr>
+        <p:spPr>
+          <a:xfrm>
+            <a:off x="1280160" y="2432066"/>
             <a:ext cx="10424160" cy="640080"/>
           </a:xfrm>
           <a:prstGeom prst="rect">
@@ -4272,13 +2845,13 @@
       </p:sp>
       <p:sp>
         <p:nvSpPr>
-          <p:cNvPr id="12" name="Text 10"/>
-          <p:cNvSpPr/>
-          <p:nvPr/>
-        </p:nvSpPr>
-        <p:spPr>
-          <a:xfrm>
-            <a:off x="1463040" y="2423160"/>
+          <p:cNvPr id="17" name="Text 15"/>
+          <p:cNvSpPr/>
+          <p:nvPr/>
+        </p:nvSpPr>
+        <p:spPr>
+          <a:xfrm>
+            <a:off x="1463040" y="2523506"/>
             <a:ext cx="2286000" cy="457200"/>
           </a:xfrm>
           <a:prstGeom prst="rect">
@@ -4303,7 +2876,7 @@
                 <a:ea typeface="Plus Jakarta Sans" pitchFamily="34" charset="-122"/>
                 <a:cs typeface="Plus Jakarta Sans" pitchFamily="34" charset="-120"/>
               </a:rPr>
-              <a:t>Base de datos</a:t>
+              <a:t>API</a:t>
             </a:r>
             <a:endParaRPr lang="en-US" sz="1400" dirty="0"/>
           </a:p>
@@ -4311,13 +2884,13 @@
       </p:sp>
       <p:sp>
         <p:nvSpPr>
-          <p:cNvPr id="13" name="Text 11"/>
-          <p:cNvSpPr/>
-          <p:nvPr/>
-        </p:nvSpPr>
-        <p:spPr>
-          <a:xfrm>
-            <a:off x="3840480" y="2423160"/>
+          <p:cNvPr id="18" name="Text 16"/>
+          <p:cNvSpPr/>
+          <p:nvPr/>
+        </p:nvSpPr>
+        <p:spPr>
+          <a:xfrm>
+            <a:off x="3840480" y="2523506"/>
             <a:ext cx="7680960" cy="457200"/>
           </a:xfrm>
           <a:prstGeom prst="rect">
@@ -4342,7 +2915,7 @@
                 <a:ea typeface="Inter" pitchFamily="34" charset="-122"/>
                 <a:cs typeface="Inter" pitchFamily="34" charset="-120"/>
               </a:rPr>
-              <a:t>Ejecutar 00_RunAll.sql en SQL Server (SSMS o sqlcmd).</a:t>
+              <a:t>cd UHabitacional.API → dotnet restore → dotnet run</a:t>
             </a:r>
             <a:endParaRPr lang="en-US" sz="1100" dirty="0"/>
           </a:p>
@@ -4350,13 +2923,13 @@
       </p:sp>
       <p:sp>
         <p:nvSpPr>
-          <p:cNvPr id="14" name="Shape 12"/>
-          <p:cNvSpPr/>
-          <p:nvPr/>
-        </p:nvSpPr>
-        <p:spPr>
-          <a:xfrm>
-            <a:off x="457200" y="3108960"/>
+          <p:cNvPr id="19" name="Shape 17"/>
+          <p:cNvSpPr/>
+          <p:nvPr/>
+        </p:nvSpPr>
+        <p:spPr>
+          <a:xfrm>
+            <a:off x="457200" y="3209306"/>
             <a:ext cx="640080" cy="640080"/>
           </a:xfrm>
           <a:prstGeom prst="ellipse">
@@ -4375,13 +2948,13 @@
       </p:sp>
       <p:sp>
         <p:nvSpPr>
-          <p:cNvPr id="15" name="Text 13"/>
-          <p:cNvSpPr/>
-          <p:nvPr/>
-        </p:nvSpPr>
-        <p:spPr>
-          <a:xfrm>
-            <a:off x="457200" y="3108960"/>
+          <p:cNvPr id="20" name="Text 18"/>
+          <p:cNvSpPr/>
+          <p:nvPr/>
+        </p:nvSpPr>
+        <p:spPr>
+          <a:xfrm>
+            <a:off x="457200" y="3209306"/>
             <a:ext cx="640080" cy="640080"/>
           </a:xfrm>
           <a:prstGeom prst="rect">
@@ -4398,7 +2971,7 @@
               <a:buNone/>
             </a:pPr>
             <a:r>
-              <a:rPr lang="en-US" sz="2200" b="1" dirty="0">
+              <a:rPr lang="en-US" sz="2200" b="1" dirty="0" smtClean="0">
                 <a:solidFill>
                   <a:srgbClr val="FFFFFF"/>
                 </a:solidFill>
@@ -4414,13 +2987,13 @@
       </p:sp>
       <p:sp>
         <p:nvSpPr>
-          <p:cNvPr id="16" name="Shape 14"/>
-          <p:cNvSpPr/>
-          <p:nvPr/>
-        </p:nvSpPr>
-        <p:spPr>
-          <a:xfrm>
-            <a:off x="1280160" y="3108960"/>
+          <p:cNvPr id="21" name="Shape 19"/>
+          <p:cNvSpPr/>
+          <p:nvPr/>
+        </p:nvSpPr>
+        <p:spPr>
+          <a:xfrm>
+            <a:off x="1280160" y="3209306"/>
             <a:ext cx="10424160" cy="640080"/>
           </a:xfrm>
           <a:prstGeom prst="rect">
@@ -4439,13 +3012,13 @@
       </p:sp>
       <p:sp>
         <p:nvSpPr>
-          <p:cNvPr id="17" name="Text 15"/>
-          <p:cNvSpPr/>
-          <p:nvPr/>
-        </p:nvSpPr>
-        <p:spPr>
-          <a:xfrm>
-            <a:off x="1463040" y="3200400"/>
+          <p:cNvPr id="22" name="Text 20"/>
+          <p:cNvSpPr/>
+          <p:nvPr/>
+        </p:nvSpPr>
+        <p:spPr>
+          <a:xfrm>
+            <a:off x="1463040" y="3300746"/>
             <a:ext cx="2286000" cy="457200"/>
           </a:xfrm>
           <a:prstGeom prst="rect">
@@ -4470,7 +3043,7 @@
                 <a:ea typeface="Plus Jakarta Sans" pitchFamily="34" charset="-122"/>
                 <a:cs typeface="Plus Jakarta Sans" pitchFamily="34" charset="-120"/>
               </a:rPr>
-              <a:t>API</a:t>
+              <a:t>Swagger</a:t>
             </a:r>
             <a:endParaRPr lang="en-US" sz="1400" dirty="0"/>
           </a:p>
@@ -4478,13 +3051,13 @@
       </p:sp>
       <p:sp>
         <p:nvSpPr>
-          <p:cNvPr id="18" name="Text 16"/>
-          <p:cNvSpPr/>
-          <p:nvPr/>
-        </p:nvSpPr>
-        <p:spPr>
-          <a:xfrm>
-            <a:off x="3840480" y="3200400"/>
+          <p:cNvPr id="23" name="Text 21"/>
+          <p:cNvSpPr/>
+          <p:nvPr/>
+        </p:nvSpPr>
+        <p:spPr>
+          <a:xfrm>
+            <a:off x="3840480" y="3300746"/>
             <a:ext cx="7680960" cy="457200"/>
           </a:xfrm>
           <a:prstGeom prst="rect">
@@ -4509,7 +3082,7 @@
                 <a:ea typeface="Inter" pitchFamily="34" charset="-122"/>
                 <a:cs typeface="Inter" pitchFamily="34" charset="-120"/>
               </a:rPr>
-              <a:t>cd UHabitacional.API → dotnet restore → dotnet run</a:t>
+              <a:t>Abrir http://localhost:5000/swagger para probar los endpoints.</a:t>
             </a:r>
             <a:endParaRPr lang="en-US" sz="1100" dirty="0"/>
           </a:p>
@@ -4517,13 +3090,13 @@
       </p:sp>
       <p:sp>
         <p:nvSpPr>
-          <p:cNvPr id="19" name="Shape 17"/>
-          <p:cNvSpPr/>
-          <p:nvPr/>
-        </p:nvSpPr>
-        <p:spPr>
-          <a:xfrm>
-            <a:off x="457200" y="3886200"/>
+          <p:cNvPr id="24" name="Shape 22"/>
+          <p:cNvSpPr/>
+          <p:nvPr/>
+        </p:nvSpPr>
+        <p:spPr>
+          <a:xfrm>
+            <a:off x="457200" y="3986546"/>
             <a:ext cx="640080" cy="640080"/>
           </a:xfrm>
           <a:prstGeom prst="ellipse">
@@ -4542,13 +3115,13 @@
       </p:sp>
       <p:sp>
         <p:nvSpPr>
-          <p:cNvPr id="20" name="Text 18"/>
-          <p:cNvSpPr/>
-          <p:nvPr/>
-        </p:nvSpPr>
-        <p:spPr>
-          <a:xfrm>
-            <a:off x="457200" y="3886200"/>
+          <p:cNvPr id="25" name="Text 23"/>
+          <p:cNvSpPr/>
+          <p:nvPr/>
+        </p:nvSpPr>
+        <p:spPr>
+          <a:xfrm>
+            <a:off x="457200" y="3986546"/>
             <a:ext cx="640080" cy="640080"/>
           </a:xfrm>
           <a:prstGeom prst="rect">
@@ -4565,7 +3138,7 @@
               <a:buNone/>
             </a:pPr>
             <a:r>
-              <a:rPr lang="en-US" sz="2200" b="1" dirty="0">
+              <a:rPr lang="en-US" sz="2200" b="1" dirty="0" smtClean="0">
                 <a:solidFill>
                   <a:srgbClr val="FFFFFF"/>
                 </a:solidFill>
@@ -4581,13 +3154,13 @@
       </p:sp>
       <p:sp>
         <p:nvSpPr>
-          <p:cNvPr id="21" name="Shape 19"/>
-          <p:cNvSpPr/>
-          <p:nvPr/>
-        </p:nvSpPr>
-        <p:spPr>
-          <a:xfrm>
-            <a:off x="1280160" y="3886200"/>
+          <p:cNvPr id="26" name="Shape 24"/>
+          <p:cNvSpPr/>
+          <p:nvPr/>
+        </p:nvSpPr>
+        <p:spPr>
+          <a:xfrm>
+            <a:off x="1280160" y="3986546"/>
             <a:ext cx="10424160" cy="640080"/>
           </a:xfrm>
           <a:prstGeom prst="rect">
@@ -4606,13 +3179,13 @@
       </p:sp>
       <p:sp>
         <p:nvSpPr>
-          <p:cNvPr id="22" name="Text 20"/>
-          <p:cNvSpPr/>
-          <p:nvPr/>
-        </p:nvSpPr>
-        <p:spPr>
-          <a:xfrm>
-            <a:off x="1463040" y="3977640"/>
+          <p:cNvPr id="27" name="Text 25"/>
+          <p:cNvSpPr/>
+          <p:nvPr/>
+        </p:nvSpPr>
+        <p:spPr>
+          <a:xfrm>
+            <a:off x="1463040" y="4077986"/>
             <a:ext cx="2286000" cy="457200"/>
           </a:xfrm>
           <a:prstGeom prst="rect">
@@ -4637,7 +3210,7 @@
                 <a:ea typeface="Plus Jakarta Sans" pitchFamily="34" charset="-122"/>
                 <a:cs typeface="Plus Jakarta Sans" pitchFamily="34" charset="-120"/>
               </a:rPr>
-              <a:t>Swagger</a:t>
+              <a:t>MVC</a:t>
             </a:r>
             <a:endParaRPr lang="en-US" sz="1400" dirty="0"/>
           </a:p>
@@ -4645,13 +3218,13 @@
       </p:sp>
       <p:sp>
         <p:nvSpPr>
-          <p:cNvPr id="23" name="Text 21"/>
-          <p:cNvSpPr/>
-          <p:nvPr/>
-        </p:nvSpPr>
-        <p:spPr>
-          <a:xfrm>
-            <a:off x="3840480" y="3977640"/>
+          <p:cNvPr id="28" name="Text 26"/>
+          <p:cNvSpPr/>
+          <p:nvPr/>
+        </p:nvSpPr>
+        <p:spPr>
+          <a:xfrm>
+            <a:off x="3840480" y="4077986"/>
             <a:ext cx="7680960" cy="457200"/>
           </a:xfrm>
           <a:prstGeom prst="rect">
@@ -4676,7 +3249,7 @@
                 <a:ea typeface="Inter" pitchFamily="34" charset="-122"/>
                 <a:cs typeface="Inter" pitchFamily="34" charset="-120"/>
               </a:rPr>
-              <a:t>Abrir http://localhost:5000/swagger para probar los endpoints.</a:t>
+              <a:t>cd UHabitacional.MVC → dotnet run y abrir el navegador.</a:t>
             </a:r>
             <a:endParaRPr lang="en-US" sz="1100" dirty="0"/>
           </a:p>
@@ -4684,13 +3257,13 @@
       </p:sp>
       <p:sp>
         <p:nvSpPr>
-          <p:cNvPr id="24" name="Shape 22"/>
-          <p:cNvSpPr/>
-          <p:nvPr/>
-        </p:nvSpPr>
-        <p:spPr>
-          <a:xfrm>
-            <a:off x="457200" y="4663440"/>
+          <p:cNvPr id="29" name="Shape 27"/>
+          <p:cNvSpPr/>
+          <p:nvPr/>
+        </p:nvSpPr>
+        <p:spPr>
+          <a:xfrm>
+            <a:off x="457200" y="4763786"/>
             <a:ext cx="640080" cy="640080"/>
           </a:xfrm>
           <a:prstGeom prst="ellipse">
@@ -4709,13 +3282,13 @@
       </p:sp>
       <p:sp>
         <p:nvSpPr>
-          <p:cNvPr id="25" name="Text 23"/>
-          <p:cNvSpPr/>
-          <p:nvPr/>
-        </p:nvSpPr>
-        <p:spPr>
-          <a:xfrm>
-            <a:off x="457200" y="4663440"/>
+          <p:cNvPr id="30" name="Text 28"/>
+          <p:cNvSpPr/>
+          <p:nvPr/>
+        </p:nvSpPr>
+        <p:spPr>
+          <a:xfrm>
+            <a:off x="457200" y="4763786"/>
             <a:ext cx="640080" cy="640080"/>
           </a:xfrm>
           <a:prstGeom prst="rect">
@@ -4732,7 +3305,7 @@
               <a:buNone/>
             </a:pPr>
             <a:r>
-              <a:rPr lang="en-US" sz="2200" b="1" dirty="0">
+              <a:rPr lang="en-US" sz="2200" b="1" dirty="0" smtClean="0">
                 <a:solidFill>
                   <a:srgbClr val="FFFFFF"/>
                 </a:solidFill>
@@ -4748,13 +3321,13 @@
       </p:sp>
       <p:sp>
         <p:nvSpPr>
-          <p:cNvPr id="26" name="Shape 24"/>
-          <p:cNvSpPr/>
-          <p:nvPr/>
-        </p:nvSpPr>
-        <p:spPr>
-          <a:xfrm>
-            <a:off x="1280160" y="4663440"/>
+          <p:cNvPr id="31" name="Shape 29"/>
+          <p:cNvSpPr/>
+          <p:nvPr/>
+        </p:nvSpPr>
+        <p:spPr>
+          <a:xfrm>
+            <a:off x="1280160" y="4763786"/>
             <a:ext cx="10424160" cy="640080"/>
           </a:xfrm>
           <a:prstGeom prst="rect">
@@ -4773,13 +3346,13 @@
       </p:sp>
       <p:sp>
         <p:nvSpPr>
-          <p:cNvPr id="27" name="Text 25"/>
-          <p:cNvSpPr/>
-          <p:nvPr/>
-        </p:nvSpPr>
-        <p:spPr>
-          <a:xfrm>
-            <a:off x="1463040" y="4754880"/>
+          <p:cNvPr id="32" name="Text 30"/>
+          <p:cNvSpPr/>
+          <p:nvPr/>
+        </p:nvSpPr>
+        <p:spPr>
+          <a:xfrm>
+            <a:off x="1463040" y="4855226"/>
             <a:ext cx="2286000" cy="457200"/>
           </a:xfrm>
           <a:prstGeom prst="rect">
@@ -4804,7 +3377,7 @@
                 <a:ea typeface="Plus Jakarta Sans" pitchFamily="34" charset="-122"/>
                 <a:cs typeface="Plus Jakarta Sans" pitchFamily="34" charset="-120"/>
               </a:rPr>
-              <a:t>MVC</a:t>
+              <a:t>Login inicial</a:t>
             </a:r>
             <a:endParaRPr lang="en-US" sz="1400" dirty="0"/>
           </a:p>
@@ -4812,180 +3385,13 @@
       </p:sp>
       <p:sp>
         <p:nvSpPr>
-          <p:cNvPr id="28" name="Text 26"/>
-          <p:cNvSpPr/>
-          <p:nvPr/>
-        </p:nvSpPr>
-        <p:spPr>
-          <a:xfrm>
-            <a:off x="3840480" y="4754880"/>
-            <a:ext cx="7680960" cy="457200"/>
-          </a:xfrm>
-          <a:prstGeom prst="rect">
-            <a:avLst/>
-          </a:prstGeom>
-          <a:noFill/>
-          <a:ln/>
-        </p:spPr>
-        <p:txBody>
-          <a:bodyPr wrap="square" lIns="0" tIns="0" rIns="0" bIns="0" rtlCol="0" anchor="ctr"/>
-          <a:lstStyle/>
-          <a:p>
-            <a:pPr marL="0" indent="0">
-              <a:buNone/>
-            </a:pPr>
-            <a:r>
-              <a:rPr lang="en-US" sz="1100" dirty="0">
-                <a:solidFill>
-                  <a:srgbClr val="6E6E6E"/>
-                </a:solidFill>
-                <a:latin typeface="Inter" pitchFamily="34" charset="0"/>
-                <a:ea typeface="Inter" pitchFamily="34" charset="-122"/>
-                <a:cs typeface="Inter" pitchFamily="34" charset="-120"/>
-              </a:rPr>
-              <a:t>cd UHabitacional.MVC → dotnet run y abrir el navegador.</a:t>
-            </a:r>
-            <a:endParaRPr lang="en-US" sz="1100" dirty="0"/>
-          </a:p>
-        </p:txBody>
-      </p:sp>
-      <p:sp>
-        <p:nvSpPr>
-          <p:cNvPr id="29" name="Shape 27"/>
-          <p:cNvSpPr/>
-          <p:nvPr/>
-        </p:nvSpPr>
-        <p:spPr>
-          <a:xfrm>
-            <a:off x="457200" y="5440680"/>
-            <a:ext cx="640080" cy="640080"/>
-          </a:xfrm>
-          <a:prstGeom prst="ellipse">
-            <a:avLst/>
-          </a:prstGeom>
-          <a:solidFill>
-            <a:srgbClr val="CB6843"/>
-          </a:solidFill>
-          <a:ln w="12700">
-            <a:solidFill>
-              <a:srgbClr val="CB6843"/>
-            </a:solidFill>
-            <a:prstDash val="solid"/>
-          </a:ln>
-        </p:spPr>
-      </p:sp>
-      <p:sp>
-        <p:nvSpPr>
-          <p:cNvPr id="30" name="Text 28"/>
-          <p:cNvSpPr/>
-          <p:nvPr/>
-        </p:nvSpPr>
-        <p:spPr>
-          <a:xfrm>
-            <a:off x="457200" y="5440680"/>
-            <a:ext cx="640080" cy="640080"/>
-          </a:xfrm>
-          <a:prstGeom prst="rect">
-            <a:avLst/>
-          </a:prstGeom>
-          <a:noFill/>
-          <a:ln/>
-        </p:spPr>
-        <p:txBody>
-          <a:bodyPr wrap="square" lIns="0" tIns="0" rIns="0" bIns="0" rtlCol="0" anchor="ctr"/>
-          <a:lstStyle/>
-          <a:p>
-            <a:pPr marL="0" indent="0" algn="ctr">
-              <a:buNone/>
-            </a:pPr>
-            <a:r>
-              <a:rPr lang="en-US" sz="2200" b="1" dirty="0">
-                <a:solidFill>
-                  <a:srgbClr val="FFFFFF"/>
-                </a:solidFill>
-                <a:latin typeface="Plus Jakarta Sans" pitchFamily="34" charset="0"/>
-                <a:ea typeface="Plus Jakarta Sans" pitchFamily="34" charset="-122"/>
-                <a:cs typeface="Plus Jakarta Sans" pitchFamily="34" charset="-120"/>
-              </a:rPr>
-              <a:t>5</a:t>
-            </a:r>
-            <a:endParaRPr lang="en-US" sz="2200" dirty="0"/>
-          </a:p>
-        </p:txBody>
-      </p:sp>
-      <p:sp>
-        <p:nvSpPr>
-          <p:cNvPr id="31" name="Shape 29"/>
-          <p:cNvSpPr/>
-          <p:nvPr/>
-        </p:nvSpPr>
-        <p:spPr>
-          <a:xfrm>
-            <a:off x="1280160" y="5440680"/>
-            <a:ext cx="10424160" cy="640080"/>
-          </a:xfrm>
-          <a:prstGeom prst="rect">
-            <a:avLst/>
-          </a:prstGeom>
-          <a:solidFill>
-            <a:srgbClr val="FFFFFF"/>
-          </a:solidFill>
-          <a:ln w="12700">
-            <a:solidFill>
-              <a:srgbClr val="D9D5CB"/>
-            </a:solidFill>
-            <a:prstDash val="solid"/>
-          </a:ln>
-        </p:spPr>
-      </p:sp>
-      <p:sp>
-        <p:nvSpPr>
-          <p:cNvPr id="32" name="Text 30"/>
-          <p:cNvSpPr/>
-          <p:nvPr/>
-        </p:nvSpPr>
-        <p:spPr>
-          <a:xfrm>
-            <a:off x="1463040" y="5532120"/>
-            <a:ext cx="2286000" cy="457200"/>
-          </a:xfrm>
-          <a:prstGeom prst="rect">
-            <a:avLst/>
-          </a:prstGeom>
-          <a:noFill/>
-          <a:ln/>
-        </p:spPr>
-        <p:txBody>
-          <a:bodyPr wrap="square" lIns="0" tIns="0" rIns="0" bIns="0" rtlCol="0" anchor="ctr"/>
-          <a:lstStyle/>
-          <a:p>
-            <a:pPr marL="0" indent="0">
-              <a:buNone/>
-            </a:pPr>
-            <a:r>
-              <a:rPr lang="en-US" sz="1400" b="1" dirty="0">
-                <a:solidFill>
-                  <a:srgbClr val="1F3528"/>
-                </a:solidFill>
-                <a:latin typeface="Plus Jakarta Sans" pitchFamily="34" charset="0"/>
-                <a:ea typeface="Plus Jakarta Sans" pitchFamily="34" charset="-122"/>
-                <a:cs typeface="Plus Jakarta Sans" pitchFamily="34" charset="-120"/>
-              </a:rPr>
-              <a:t>Login inicial</a:t>
-            </a:r>
-            <a:endParaRPr lang="en-US" sz="1400" dirty="0"/>
-          </a:p>
-        </p:txBody>
-      </p:sp>
-      <p:sp>
-        <p:nvSpPr>
           <p:cNvPr id="33" name="Text 31"/>
           <p:cNvSpPr/>
           <p:nvPr/>
         </p:nvSpPr>
         <p:spPr>
           <a:xfrm>
-            <a:off x="3840480" y="5532120"/>
+            <a:off x="3840480" y="4855226"/>
             <a:ext cx="7680960" cy="457200"/>
           </a:xfrm>
           <a:prstGeom prst="rect">
@@ -5102,7 +3508,7 @@
 </p:sld>
 </file>
 
-<file path=ppt/slides/slide12.xml><?xml version="1.0" encoding="utf-8"?>
+<file path=ppt/slides/slide11.xml><?xml version="1.0" encoding="utf-8"?>
 <p:sld xmlns:a="http://schemas.openxmlformats.org/drawingml/2006/main" xmlns:r="http://schemas.openxmlformats.org/officeDocument/2006/relationships" xmlns:p="http://schemas.openxmlformats.org/presentationml/2006/main">
   <p:cSld name="Slide 12">
     <p:bg>
@@ -5608,7 +4014,29 @@
                 <a:ea typeface="Inter" pitchFamily="34" charset="-122"/>
                 <a:cs typeface="Inter" pitchFamily="34" charset="-120"/>
               </a:rPr>
-              <a:t>JWT firmado, sesión validada en BD y hashing de contraseñas con BCrypt.</a:t>
+              <a:t>JWT firmado, sesión validada en BD y hashing de </a:t>
+            </a:r>
+            <a:r>
+              <a:rPr lang="en-US" sz="1100" dirty="0" err="1" smtClean="0">
+                <a:solidFill>
+                  <a:srgbClr val="A8C09A"/>
+                </a:solidFill>
+                <a:latin typeface="Inter" pitchFamily="34" charset="0"/>
+                <a:ea typeface="Inter" pitchFamily="34" charset="-122"/>
+                <a:cs typeface="Inter" pitchFamily="34" charset="-120"/>
+              </a:rPr>
+              <a:t>contraseñas</a:t>
+            </a:r>
+            <a:r>
+              <a:rPr lang="en-US" sz="1100" dirty="0" smtClean="0">
+                <a:solidFill>
+                  <a:srgbClr val="A8C09A"/>
+                </a:solidFill>
+                <a:latin typeface="Inter" pitchFamily="34" charset="0"/>
+                <a:ea typeface="Inter" pitchFamily="34" charset="-122"/>
+                <a:cs typeface="Inter" pitchFamily="34" charset="-120"/>
+              </a:rPr>
+              <a:t>.</a:t>
             </a:r>
             <a:endParaRPr lang="en-US" sz="1100" dirty="0"/>
           </a:p>
@@ -5814,18 +4242,7 @@
                 <a:ea typeface="Inter" pitchFamily="34" charset="-122"/>
                 <a:cs typeface="Inter" pitchFamily="34" charset="-120"/>
               </a:rPr>
-              <a:t>Alejandra </a:t>
-            </a:r>
-            <a:r>
-              <a:rPr lang="en-US" sz="1100" smtClean="0">
-                <a:solidFill>
-                  <a:srgbClr val="A8C09A"/>
-                </a:solidFill>
-                <a:latin typeface="Inter" pitchFamily="34" charset="0"/>
-                <a:ea typeface="Inter" pitchFamily="34" charset="-122"/>
-                <a:cs typeface="Inter" pitchFamily="34" charset="-120"/>
-              </a:rPr>
-              <a:t>Escobar Rodríguez </a:t>
+              <a:t>Alejandra Escobar Rodríguez </a:t>
             </a:r>
             <a:r>
               <a:rPr lang="en-US" sz="1100" dirty="0">
@@ -7637,6 +6054,17 @@
               <a:buChar char="■"/>
             </a:pPr>
             <a:r>
+              <a:rPr lang="en-US" sz="1100" dirty="0" err="1">
+                <a:solidFill>
+                  <a:srgbClr val="1A1A1A"/>
+                </a:solidFill>
+                <a:latin typeface="Inter" pitchFamily="34" charset="0"/>
+                <a:ea typeface="Inter" pitchFamily="34" charset="-122"/>
+                <a:cs typeface="Inter" pitchFamily="34" charset="-120"/>
+              </a:rPr>
+              <a:t>Cliente</a:t>
+            </a:r>
+            <a:r>
               <a:rPr lang="en-US" sz="1100" dirty="0">
                 <a:solidFill>
                   <a:srgbClr val="1A1A1A"/>
@@ -7645,7 +6073,18 @@
                 <a:ea typeface="Inter" pitchFamily="34" charset="-122"/>
                 <a:cs typeface="Inter" pitchFamily="34" charset="-120"/>
               </a:rPr>
-              <a:t>Cliente HttpClient tipado</a:t>
+              <a:t> </a:t>
+            </a:r>
+            <a:r>
+              <a:rPr lang="en-US" sz="1100" dirty="0" err="1" smtClean="0">
+                <a:solidFill>
+                  <a:srgbClr val="1A1A1A"/>
+                </a:solidFill>
+                <a:latin typeface="Inter" pitchFamily="34" charset="0"/>
+                <a:ea typeface="Inter" pitchFamily="34" charset="-122"/>
+                <a:cs typeface="Inter" pitchFamily="34" charset="-120"/>
+              </a:rPr>
+              <a:t>HttpClient</a:t>
             </a:r>
             <a:endParaRPr lang="en-US" sz="1100" dirty="0"/>
           </a:p>
@@ -7666,9 +6105,19 @@
                 <a:ea typeface="Inter" pitchFamily="34" charset="-122"/>
                 <a:cs typeface="Inter" pitchFamily="34" charset="-120"/>
               </a:rPr>
-              <a:t>Sesión cookie + JWT</a:t>
-            </a:r>
-            <a:endParaRPr lang="en-US" sz="1100" dirty="0"/>
+              <a:t>Sesión cookie + </a:t>
+            </a:r>
+            <a:r>
+              <a:rPr lang="en-US" sz="1100" dirty="0" smtClean="0">
+                <a:solidFill>
+                  <a:srgbClr val="1A1A1A"/>
+                </a:solidFill>
+                <a:latin typeface="Inter" pitchFamily="34" charset="0"/>
+                <a:ea typeface="Inter" pitchFamily="34" charset="-122"/>
+                <a:cs typeface="Inter" pitchFamily="34" charset="-120"/>
+              </a:rPr>
+              <a:t>JWT</a:t>
+            </a:r>
           </a:p>
           <a:p>
             <a:pPr marL="342900" indent="-342900">
@@ -7679,6 +6128,17 @@
               <a:buChar char="■"/>
             </a:pPr>
             <a:r>
+              <a:rPr lang="en-US" sz="1100" dirty="0" smtClean="0">
+                <a:solidFill>
+                  <a:srgbClr val="1A1A1A"/>
+                </a:solidFill>
+                <a:latin typeface="Inter" pitchFamily="34" charset="0"/>
+                <a:ea typeface="Inter" pitchFamily="34" charset="-122"/>
+                <a:cs typeface="Inter" pitchFamily="34" charset="-120"/>
+              </a:rPr>
+              <a:t>Vistas </a:t>
+            </a:r>
+            <a:r>
               <a:rPr lang="en-US" sz="1100" dirty="0">
                 <a:solidFill>
                   <a:srgbClr val="1A1A1A"/>
@@ -7687,28 +6147,7 @@
                 <a:ea typeface="Inter" pitchFamily="34" charset="-122"/>
                 <a:cs typeface="Inter" pitchFamily="34" charset="-120"/>
               </a:rPr>
-              <a:t>Identidad Bosque Urbano</a:t>
-            </a:r>
-            <a:endParaRPr lang="en-US" sz="1100" dirty="0"/>
-          </a:p>
-          <a:p>
-            <a:pPr marL="342900" indent="-342900">
-              <a:spcAft>
-                <a:spcPts val="400"/>
-              </a:spcAft>
-              <a:buSzPct val="100000"/>
-              <a:buChar char="■"/>
-            </a:pPr>
-            <a:r>
-              <a:rPr lang="en-US" sz="1100" dirty="0">
-                <a:solidFill>
-                  <a:srgbClr val="1A1A1A"/>
-                </a:solidFill>
-                <a:latin typeface="Inter" pitchFamily="34" charset="0"/>
-                <a:ea typeface="Inter" pitchFamily="34" charset="-122"/>
-                <a:cs typeface="Inter" pitchFamily="34" charset="-120"/>
-              </a:rPr>
-              <a:t>Vistas por rol</a:t>
+              <a:t>por rol</a:t>
             </a:r>
             <a:endParaRPr lang="en-US" sz="1100" dirty="0"/>
           </a:p>
@@ -7939,20 +6378,10 @@
                 <a:ea typeface="Inter" pitchFamily="34" charset="-122"/>
                 <a:cs typeface="Inter" pitchFamily="34" charset="-120"/>
               </a:rPr>
-              <a:t>9 tablas (incluye Sesion)</a:t>
-            </a:r>
-            <a:endParaRPr lang="en-US" sz="1100" dirty="0"/>
-          </a:p>
-          <a:p>
-            <a:pPr marL="342900" indent="-342900">
-              <a:spcAft>
-                <a:spcPts val="400"/>
-              </a:spcAft>
-              <a:buSzPct val="100000"/>
-              <a:buChar char="■"/>
-            </a:pPr>
-            <a:r>
-              <a:rPr lang="en-US" sz="1100" dirty="0">
+              <a:t>9 tablas (incluye </a:t>
+            </a:r>
+            <a:r>
+              <a:rPr lang="en-US" sz="1100" dirty="0" err="1">
                 <a:solidFill>
                   <a:srgbClr val="1A1A1A"/>
                 </a:solidFill>
@@ -7960,20 +6389,10 @@
                 <a:ea typeface="Inter" pitchFamily="34" charset="-122"/>
                 <a:cs typeface="Inter" pitchFamily="34" charset="-120"/>
               </a:rPr>
-              <a:t>00_RunAll.sql</a:t>
-            </a:r>
-            <a:endParaRPr lang="en-US" sz="1100" dirty="0"/>
-          </a:p>
-          <a:p>
-            <a:pPr marL="342900" indent="-342900">
-              <a:spcAft>
-                <a:spcPts val="400"/>
-              </a:spcAft>
-              <a:buSzPct val="100000"/>
-              <a:buChar char="■"/>
-            </a:pPr>
-            <a:r>
-              <a:rPr lang="en-US" sz="1100" dirty="0">
+              <a:t>Sesion</a:t>
+            </a:r>
+            <a:r>
+              <a:rPr lang="en-US" sz="1100" dirty="0" smtClean="0">
                 <a:solidFill>
                   <a:srgbClr val="1A1A1A"/>
                 </a:solidFill>
@@ -7981,7 +6400,7 @@
                 <a:ea typeface="Inter" pitchFamily="34" charset="-122"/>
                 <a:cs typeface="Inter" pitchFamily="34" charset="-120"/>
               </a:rPr>
-              <a:t>Migración incremental</a:t>
+              <a:t>)</a:t>
             </a:r>
             <a:endParaRPr lang="en-US" sz="1100" dirty="0"/>
           </a:p>
@@ -11634,7 +10053,7 @@
               <a:buNone/>
             </a:pPr>
             <a:r>
-              <a:rPr lang="en-US" sz="1000" dirty="0">
+              <a:rPr lang="en-US" sz="1000" dirty="0" smtClean="0">
                 <a:solidFill>
                   <a:srgbClr val="6E6E6E"/>
                 </a:solidFill>
@@ -11642,7 +10061,7 @@
                 <a:ea typeface="Inter" pitchFamily="34" charset="-122"/>
                 <a:cs typeface="Inter" pitchFamily="34" charset="-120"/>
               </a:rPr>
-              <a:t>ORM con Code-First sobre SQL Server</a:t>
+              <a:t>ORM</a:t>
             </a:r>
             <a:endParaRPr lang="en-US" sz="1000" dirty="0"/>
           </a:p>
@@ -11801,6 +10220,17 @@
               <a:buNone/>
             </a:pPr>
             <a:r>
+              <a:rPr lang="en-US" sz="1000" dirty="0" smtClean="0">
+                <a:solidFill>
+                  <a:srgbClr val="6E6E6E"/>
+                </a:solidFill>
+                <a:latin typeface="Inter" pitchFamily="34" charset="0"/>
+                <a:ea typeface="Inter" pitchFamily="34" charset="-122"/>
+                <a:cs typeface="Inter" pitchFamily="34" charset="-120"/>
+              </a:rPr>
+              <a:t>BD </a:t>
+            </a:r>
+            <a:r>
               <a:rPr lang="en-US" sz="1000" dirty="0">
                 <a:solidFill>
                   <a:srgbClr val="6E6E6E"/>
@@ -11809,7 +10239,18 @@
                 <a:ea typeface="Inter" pitchFamily="34" charset="-122"/>
                 <a:cs typeface="Inter" pitchFamily="34" charset="-120"/>
               </a:rPr>
-              <a:t>Motor relacional con scripts T-SQL versionados</a:t>
+              <a:t>relacional con scripts </a:t>
+            </a:r>
+            <a:r>
+              <a:rPr lang="en-US" sz="1000" dirty="0" smtClean="0">
+                <a:solidFill>
+                  <a:srgbClr val="6E6E6E"/>
+                </a:solidFill>
+                <a:latin typeface="Inter" pitchFamily="34" charset="0"/>
+                <a:ea typeface="Inter" pitchFamily="34" charset="-122"/>
+                <a:cs typeface="Inter" pitchFamily="34" charset="-120"/>
+              </a:rPr>
+              <a:t>T-SQL</a:t>
             </a:r>
             <a:endParaRPr lang="en-US" sz="1000" dirty="0"/>
           </a:p>
@@ -11976,7 +10417,29 @@
                 <a:ea typeface="Inter" pitchFamily="34" charset="-122"/>
                 <a:cs typeface="Inter" pitchFamily="34" charset="-120"/>
               </a:rPr>
-              <a:t>Tokens firmados con validación de sesión en BD</a:t>
+              <a:t>Tokens </a:t>
+            </a:r>
+            <a:r>
+              <a:rPr lang="en-US" sz="1000" dirty="0" smtClean="0">
+                <a:solidFill>
+                  <a:srgbClr val="6E6E6E"/>
+                </a:solidFill>
+                <a:latin typeface="Inter" pitchFamily="34" charset="0"/>
+                <a:ea typeface="Inter" pitchFamily="34" charset="-122"/>
+                <a:cs typeface="Inter" pitchFamily="34" charset="-120"/>
+              </a:rPr>
+              <a:t>con </a:t>
+            </a:r>
+            <a:r>
+              <a:rPr lang="en-US" sz="1000" dirty="0">
+                <a:solidFill>
+                  <a:srgbClr val="6E6E6E"/>
+                </a:solidFill>
+                <a:latin typeface="Inter" pitchFamily="34" charset="0"/>
+                <a:ea typeface="Inter" pitchFamily="34" charset="-122"/>
+                <a:cs typeface="Inter" pitchFamily="34" charset="-120"/>
+              </a:rPr>
+              <a:t>validación de sesión en BD</a:t>
             </a:r>
             <a:endParaRPr lang="en-US" sz="1000" dirty="0"/>
           </a:p>
@@ -12096,15 +10559,14 @@
               <a:buNone/>
             </a:pPr>
             <a:r>
-              <a:rPr lang="en-US" sz="1400" b="1" dirty="0">
+              <a:rPr lang="en-US" sz="1400" b="1" dirty="0" err="1" smtClean="0">
                 <a:solidFill>
                   <a:srgbClr val="1F3528"/>
                 </a:solidFill>
                 <a:latin typeface="Plus Jakarta Sans" pitchFamily="34" charset="0"/>
                 <a:ea typeface="Plus Jakarta Sans" pitchFamily="34" charset="-122"/>
-                <a:cs typeface="Plus Jakarta Sans" pitchFamily="34" charset="-120"/>
-              </a:rPr>
-              <a:t>BCrypt</a:t>
+              </a:rPr>
+              <a:t>Encriptado</a:t>
             </a:r>
             <a:endParaRPr lang="en-US" sz="1400" dirty="0"/>
           </a:p>
@@ -12302,6 +10764,28 @@
               <a:buNone/>
             </a:pPr>
             <a:r>
+              <a:rPr lang="en-US" sz="1000" dirty="0" err="1" smtClean="0">
+                <a:solidFill>
+                  <a:srgbClr val="6E6E6E"/>
+                </a:solidFill>
+                <a:latin typeface="Inter" pitchFamily="34" charset="0"/>
+                <a:ea typeface="Inter" pitchFamily="34" charset="-122"/>
+                <a:cs typeface="Inter" pitchFamily="34" charset="-120"/>
+              </a:rPr>
+              <a:t>Documentación</a:t>
+            </a:r>
+            <a:r>
+              <a:rPr lang="en-US" sz="1000" dirty="0" smtClean="0">
+                <a:solidFill>
+                  <a:srgbClr val="6E6E6E"/>
+                </a:solidFill>
+                <a:latin typeface="Inter" pitchFamily="34" charset="0"/>
+                <a:ea typeface="Inter" pitchFamily="34" charset="-122"/>
+                <a:cs typeface="Inter" pitchFamily="34" charset="-120"/>
+              </a:rPr>
+              <a:t> de </a:t>
+            </a:r>
+            <a:r>
               <a:rPr lang="en-US" sz="1000" dirty="0">
                 <a:solidFill>
                   <a:srgbClr val="6E6E6E"/>
@@ -12310,7 +10794,7 @@
                 <a:ea typeface="Inter" pitchFamily="34" charset="-122"/>
                 <a:cs typeface="Inter" pitchFamily="34" charset="-120"/>
               </a:rPr>
-              <a:t>Documentación interactiva de la API</a:t>
+              <a:t>la API</a:t>
             </a:r>
             <a:endParaRPr lang="en-US" sz="1000" dirty="0"/>
           </a:p>
@@ -12477,7 +10961,18 @@
                 <a:ea typeface="Inter" pitchFamily="34" charset="-122"/>
                 <a:cs typeface="Inter" pitchFamily="34" charset="-120"/>
               </a:rPr>
-              <a:t>Front-end con Razor + Tag Helpers</a:t>
+              <a:t>Front-end con </a:t>
+            </a:r>
+            <a:r>
+              <a:rPr lang="en-US" sz="1000" dirty="0" smtClean="0">
+                <a:solidFill>
+                  <a:srgbClr val="6E6E6E"/>
+                </a:solidFill>
+                <a:latin typeface="Inter" pitchFamily="34" charset="0"/>
+                <a:ea typeface="Inter" pitchFamily="34" charset="-122"/>
+                <a:cs typeface="Inter" pitchFamily="34" charset="-120"/>
+              </a:rPr>
+              <a:t>Razor</a:t>
             </a:r>
             <a:endParaRPr lang="en-US" sz="1000" dirty="0"/>
           </a:p>
@@ -12597,7 +11092,7 @@
               <a:buNone/>
             </a:pPr>
             <a:r>
-              <a:rPr lang="en-US" sz="1400" b="1" dirty="0">
+              <a:rPr lang="en-US" sz="1400" b="1" dirty="0" err="1" smtClean="0">
                 <a:solidFill>
                   <a:srgbClr val="1F3528"/>
                 </a:solidFill>
@@ -12605,7 +11100,7 @@
                 <a:ea typeface="Plus Jakarta Sans" pitchFamily="34" charset="-122"/>
                 <a:cs typeface="Plus Jakarta Sans" pitchFamily="34" charset="-120"/>
               </a:rPr>
-              <a:t>HttpClient tipado</a:t>
+              <a:t>HttpClient</a:t>
             </a:r>
             <a:endParaRPr lang="en-US" sz="1400" dirty="0"/>
           </a:p>
@@ -13008,18 +11503,7 @@
                 <a:ea typeface="Plus Jakarta Sans" pitchFamily="34" charset="-122"/>
                 <a:cs typeface="Plus Jakarta Sans" pitchFamily="34" charset="-120"/>
               </a:rPr>
-              <a:t>J</a:t>
-            </a:r>
-            <a:r>
-              <a:rPr lang="en-US" sz="3200" b="1" dirty="0" smtClean="0">
-                <a:solidFill>
-                  <a:srgbClr val="1F3528"/>
-                </a:solidFill>
-                <a:latin typeface="Plus Jakarta Sans" pitchFamily="34" charset="0"/>
-                <a:ea typeface="Plus Jakarta Sans" pitchFamily="34" charset="-122"/>
-                <a:cs typeface="Plus Jakarta Sans" pitchFamily="34" charset="-120"/>
-              </a:rPr>
-              <a:t>WT </a:t>
+              <a:t>JWT </a:t>
             </a:r>
             <a:r>
               <a:rPr lang="en-US" sz="3200" b="1" dirty="0">
@@ -13158,7 +11642,29 @@
                 <a:ea typeface="Inter" pitchFamily="34" charset="-122"/>
                 <a:cs typeface="Inter" pitchFamily="34" charset="-120"/>
               </a:rPr>
-              <a:t>Email + password validados con BCrypt.</a:t>
+              <a:t>Email + password </a:t>
+            </a:r>
+            <a:r>
+              <a:rPr lang="en-US" sz="1000" dirty="0" err="1" smtClean="0">
+                <a:solidFill>
+                  <a:srgbClr val="6E6E6E"/>
+                </a:solidFill>
+                <a:latin typeface="Inter" pitchFamily="34" charset="0"/>
+                <a:ea typeface="Inter" pitchFamily="34" charset="-122"/>
+                <a:cs typeface="Inter" pitchFamily="34" charset="-120"/>
+              </a:rPr>
+              <a:t>validados</a:t>
+            </a:r>
+            <a:r>
+              <a:rPr lang="en-US" sz="1000" dirty="0" smtClean="0">
+                <a:solidFill>
+                  <a:srgbClr val="6E6E6E"/>
+                </a:solidFill>
+                <a:latin typeface="Inter" pitchFamily="34" charset="0"/>
+                <a:ea typeface="Inter" pitchFamily="34" charset="-122"/>
+                <a:cs typeface="Inter" pitchFamily="34" charset="-120"/>
+              </a:rPr>
+              <a:t>.</a:t>
             </a:r>
             <a:endParaRPr lang="en-US" sz="1000" dirty="0"/>
           </a:p>
@@ -13325,7 +11831,29 @@
                 <a:ea typeface="Inter" pitchFamily="34" charset="-122"/>
                 <a:cs typeface="Inter" pitchFamily="34" charset="-120"/>
               </a:rPr>
-              <a:t>Token firmado HMAC con claims del usuario.</a:t>
+              <a:t>Token </a:t>
+            </a:r>
+            <a:r>
+              <a:rPr lang="en-US" sz="1000" dirty="0" err="1" smtClean="0">
+                <a:solidFill>
+                  <a:srgbClr val="6E6E6E"/>
+                </a:solidFill>
+                <a:latin typeface="Inter" pitchFamily="34" charset="0"/>
+                <a:ea typeface="Inter" pitchFamily="34" charset="-122"/>
+                <a:cs typeface="Inter" pitchFamily="34" charset="-120"/>
+              </a:rPr>
+              <a:t>firmado</a:t>
+            </a:r>
+            <a:r>
+              <a:rPr lang="en-US" sz="1000" dirty="0" smtClean="0">
+                <a:solidFill>
+                  <a:srgbClr val="6E6E6E"/>
+                </a:solidFill>
+                <a:latin typeface="Inter" pitchFamily="34" charset="0"/>
+                <a:ea typeface="Inter" pitchFamily="34" charset="-122"/>
+                <a:cs typeface="Inter" pitchFamily="34" charset="-120"/>
+              </a:rPr>
+              <a:t>.</a:t>
             </a:r>
             <a:endParaRPr lang="en-US" sz="1000" dirty="0"/>
           </a:p>
@@ -14038,7 +12566,7 @@
               <a:buNone/>
             </a:pPr>
             <a:r>
-              <a:rPr lang="en-US" sz="900" dirty="0">
+              <a:rPr lang="en-US" sz="900" dirty="0" smtClean="0">
                 <a:solidFill>
                   <a:srgbClr val="A8C09A"/>
                 </a:solidFill>
@@ -14046,7 +12574,18 @@
                 <a:ea typeface="Inter" pitchFamily="34" charset="-122"/>
                 <a:cs typeface="Inter" pitchFamily="34" charset="-120"/>
               </a:rPr>
-              <a:t>Secret, issuer y expiración configurables</a:t>
+              <a:t>Secret y </a:t>
+            </a:r>
+            <a:r>
+              <a:rPr lang="en-US" sz="900" dirty="0" err="1" smtClean="0">
+                <a:solidFill>
+                  <a:srgbClr val="A8C09A"/>
+                </a:solidFill>
+                <a:latin typeface="Inter" pitchFamily="34" charset="0"/>
+                <a:ea typeface="Inter" pitchFamily="34" charset="-122"/>
+                <a:cs typeface="Inter" pitchFamily="34" charset="-120"/>
+              </a:rPr>
+              <a:t>expiración</a:t>
             </a:r>
             <a:endParaRPr lang="en-US" sz="900" dirty="0"/>
           </a:p>
@@ -14281,84 +12820,6 @@
                 <a:cs typeface="Inter" pitchFamily="34" charset="-120"/>
               </a:rPr>
               <a:t>Respuestas HTTP consistentes</a:t>
-            </a:r>
-            <a:endParaRPr lang="en-US" sz="900" dirty="0"/>
-          </a:p>
-        </p:txBody>
-      </p:sp>
-      <p:sp>
-        <p:nvSpPr>
-          <p:cNvPr id="45" name="Text 43"/>
-          <p:cNvSpPr/>
-          <p:nvPr/>
-        </p:nvSpPr>
-        <p:spPr>
-          <a:xfrm>
-            <a:off x="8001000" y="5532120"/>
-            <a:ext cx="3520440" cy="256032"/>
-          </a:xfrm>
-          <a:prstGeom prst="rect">
-            <a:avLst/>
-          </a:prstGeom>
-          <a:noFill/>
-          <a:ln/>
-        </p:spPr>
-        <p:txBody>
-          <a:bodyPr wrap="square" lIns="0" tIns="0" rIns="0" bIns="0" rtlCol="0" anchor="ctr"/>
-          <a:lstStyle/>
-          <a:p>
-            <a:pPr marL="0" indent="0">
-              <a:buNone/>
-            </a:pPr>
-            <a:r>
-              <a:rPr lang="en-US" sz="1100" b="1" dirty="0">
-                <a:solidFill>
-                  <a:srgbClr val="FFFFFF"/>
-                </a:solidFill>
-                <a:latin typeface="Inter" pitchFamily="34" charset="0"/>
-                <a:ea typeface="Inter" pitchFamily="34" charset="-122"/>
-                <a:cs typeface="Inter" pitchFamily="34" charset="-120"/>
-              </a:rPr>
-              <a:t>BCrypt.Net</a:t>
-            </a:r>
-            <a:endParaRPr lang="en-US" sz="1100" dirty="0"/>
-          </a:p>
-        </p:txBody>
-      </p:sp>
-      <p:sp>
-        <p:nvSpPr>
-          <p:cNvPr id="46" name="Text 44"/>
-          <p:cNvSpPr/>
-          <p:nvPr/>
-        </p:nvSpPr>
-        <p:spPr>
-          <a:xfrm>
-            <a:off x="8001000" y="5788152"/>
-            <a:ext cx="3520440" cy="256032"/>
-          </a:xfrm>
-          <a:prstGeom prst="rect">
-            <a:avLst/>
-          </a:prstGeom>
-          <a:noFill/>
-          <a:ln/>
-        </p:spPr>
-        <p:txBody>
-          <a:bodyPr wrap="square" lIns="0" tIns="0" rIns="0" bIns="0" rtlCol="0" anchor="ctr"/>
-          <a:lstStyle/>
-          <a:p>
-            <a:pPr marL="0" indent="0">
-              <a:buNone/>
-            </a:pPr>
-            <a:r>
-              <a:rPr lang="en-US" sz="900" dirty="0">
-                <a:solidFill>
-                  <a:srgbClr val="A8C09A"/>
-                </a:solidFill>
-                <a:latin typeface="Inter" pitchFamily="34" charset="0"/>
-                <a:ea typeface="Inter" pitchFamily="34" charset="-122"/>
-                <a:cs typeface="Inter" pitchFamily="34" charset="-120"/>
-              </a:rPr>
-              <a:t>Hash con sal para contraseñas</a:t>
             </a:r>
             <a:endParaRPr lang="en-US" sz="900" dirty="0"/>
           </a:p>
